--- a/artifacts/One Model, Eight Quality Settings, Eight Bits.pptx
+++ b/artifacts/One Model, Eight Quality Settings, Eight Bits.pptx
@@ -35,11 +35,18 @@
       <p:boldItalic r:id="rId20"/>
     </p:embeddedFont>
     <p:embeddedFont>
-      <p:font typeface="JetBrains Mono"/>
+      <p:font typeface="Roboto Mono"/>
       <p:regular r:id="rId21"/>
       <p:bold r:id="rId22"/>
       <p:italic r:id="rId23"/>
       <p:boldItalic r:id="rId24"/>
+    </p:embeddedFont>
+    <p:embeddedFont>
+      <p:font typeface="JetBrains Mono"/>
+      <p:regular r:id="rId25"/>
+      <p:bold r:id="rId26"/>
+      <p:italic r:id="rId27"/>
+      <p:boldItalic r:id="rId28"/>
     </p:embeddedFont>
   </p:embeddedFontLst>
   <p:defaultTextStyle>
@@ -1433,7 +1440,7 @@
   <p:cSld>
     <p:spTree>
       <p:nvGrpSpPr>
-        <p:cNvPr id="240" name="Shape 240"/>
+        <p:cNvPr id="229" name="Shape 229"/>
         <p:cNvGrpSpPr/>
         <p:nvPr/>
       </p:nvGrpSpPr>
@@ -1447,7 +1454,7 @@
       </p:grpSpPr>
       <p:sp>
         <p:nvSpPr>
-          <p:cNvPr id="241" name="Google Shape;241;p12:notes"/>
+          <p:cNvPr id="230" name="Google Shape;230;p12:notes"/>
           <p:cNvSpPr txBox="1"/>
           <p:nvPr>
             <p:ph idx="1" type="body"/>
@@ -1491,7 +1498,7 @@
       </p:sp>
       <p:sp>
         <p:nvSpPr>
-          <p:cNvPr id="242" name="Google Shape;242;p12:notes"/>
+          <p:cNvPr id="231" name="Google Shape;231;p12:notes"/>
           <p:cNvSpPr/>
           <p:nvPr>
             <p:ph idx="2" type="sldImg"/>
@@ -3248,7 +3255,7 @@
                 <a:cs typeface="Quattrocento Sans"/>
                 <a:sym typeface="Quattrocento Sans"/>
               </a:rPr>
-              <a:t>CS6886 · COURSE PROJECT PROPOSAL · OCT 2026</a:t>
+              <a:t>CS6886 · COURSE PROJECT FINALIZED PROPOSAL · OCT 2026 - with final changes and modifications</a:t>
             </a:r>
             <a:endParaRPr b="0" i="0" sz="1000" u="none" cap="none" strike="noStrike"/>
           </a:p>
@@ -14137,7 +14144,7 @@
                 <a:cs typeface="Quattrocento Sans"/>
                 <a:sym typeface="Quattrocento Sans"/>
               </a:rPr>
-              <a:t>we mainly be focussing on FP16, INT8 - we use Gurobi or Google OR-Tools (the approach will be based on HAWQ-V3)</a:t>
+              <a:t>we mainly focus on FP16, INT8 - we use Gurobi or Google OR-Tools (the approach will be based on HAWQ-V3 or custom greedy based algorithm)</a:t>
             </a:r>
             <a:br>
               <a:rPr lang="en-US" sz="1278">
@@ -14335,7 +14342,7 @@
               <a:buNone/>
             </a:pPr>
             <a:r>
-              <a:rPr b="1" i="0" lang="en-US" sz="2600" u="none" cap="none" strike="noStrike">
+              <a:rPr b="1" lang="en-US" sz="2600">
                 <a:solidFill>
                   <a:srgbClr val="2B2320"/>
                 </a:solidFill>
@@ -14344,7 +14351,7 @@
                 <a:cs typeface="Unna"/>
                 <a:sym typeface="Unna"/>
               </a:rPr>
-              <a:t>What they open-sourced</a:t>
+              <a:t>Baseline metrics [locally on my laptop]</a:t>
             </a:r>
             <a:endParaRPr b="0" i="0" sz="2600" u="none" cap="none" strike="noStrike"/>
           </a:p>
@@ -14401,1124 +14408,18 @@
         </p:nvSpPr>
         <p:spPr>
           <a:xfrm>
-            <a:off x="609600" y="1346200"/>
-            <a:ext cx="254000" cy="254000"/>
+            <a:off x="609600" y="6451600"/>
+            <a:ext cx="10972800" cy="12700"/>
           </a:xfrm>
           <a:custGeom>
             <a:rect b="b" l="l" r="r" t="t"/>
             <a:pathLst>
-              <a:path extrusionOk="0" h="512" w="512">
-                <a:moveTo>
-                  <a:pt x="174" y="397"/>
-                </a:moveTo>
-                <a:cubicBezTo>
-                  <a:pt x="174" y="399"/>
-                  <a:pt x="172" y="401"/>
-                  <a:pt x="169" y="401"/>
-                </a:cubicBezTo>
-                <a:cubicBezTo>
-                  <a:pt x="165" y="401"/>
-                  <a:pt x="163" y="400"/>
-                  <a:pt x="163" y="397"/>
-                </a:cubicBezTo>
-                <a:cubicBezTo>
-                  <a:pt x="163" y="395"/>
-                  <a:pt x="165" y="394"/>
-                  <a:pt x="168" y="394"/>
-                </a:cubicBezTo>
-                <a:cubicBezTo>
-                  <a:pt x="171" y="393"/>
-                  <a:pt x="174" y="395"/>
-                  <a:pt x="174" y="397"/>
-                </a:cubicBezTo>
-                <a:close/>
-              </a:path>
-              <a:path extrusionOk="0" h="512" w="512">
-                <a:moveTo>
-                  <a:pt x="143" y="393"/>
-                </a:moveTo>
-                <a:cubicBezTo>
-                  <a:pt x="142" y="395"/>
-                  <a:pt x="144" y="397"/>
-                  <a:pt x="147" y="398"/>
-                </a:cubicBezTo>
-                <a:cubicBezTo>
-                  <a:pt x="150" y="399"/>
-                  <a:pt x="153" y="398"/>
-                  <a:pt x="153" y="396"/>
-                </a:cubicBezTo>
-                <a:cubicBezTo>
-                  <a:pt x="154" y="394"/>
-                  <a:pt x="152" y="391"/>
-                  <a:pt x="149" y="391"/>
-                </a:cubicBezTo>
-                <a:cubicBezTo>
-                  <a:pt x="146" y="390"/>
-                  <a:pt x="144" y="391"/>
-                  <a:pt x="143" y="393"/>
-                </a:cubicBezTo>
-                <a:close/>
-              </a:path>
-              <a:path extrusionOk="0" h="512" w="512">
-                <a:moveTo>
-                  <a:pt x="187" y="391"/>
-                </a:moveTo>
-                <a:cubicBezTo>
-                  <a:pt x="184" y="392"/>
-                  <a:pt x="182" y="394"/>
-                  <a:pt x="182" y="396"/>
-                </a:cubicBezTo>
-                <a:cubicBezTo>
-                  <a:pt x="183" y="398"/>
-                  <a:pt x="185" y="399"/>
-                  <a:pt x="188" y="399"/>
-                </a:cubicBezTo>
-                <a:cubicBezTo>
-                  <a:pt x="191" y="398"/>
-                  <a:pt x="193" y="396"/>
-                  <a:pt x="193" y="394"/>
-                </a:cubicBezTo>
-                <a:cubicBezTo>
-                  <a:pt x="193" y="392"/>
-                  <a:pt x="190" y="391"/>
-                  <a:pt x="187" y="391"/>
-                </a:cubicBezTo>
-                <a:close/>
-              </a:path>
-              <a:path extrusionOk="0" h="512" w="512">
-                <a:moveTo>
-                  <a:pt x="253" y="8"/>
-                </a:moveTo>
-                <a:cubicBezTo>
-                  <a:pt x="114" y="8"/>
-                  <a:pt x="8" y="113"/>
-                  <a:pt x="8" y="252"/>
-                </a:cubicBezTo>
-                <a:cubicBezTo>
-                  <a:pt x="8" y="363"/>
-                  <a:pt x="78" y="458"/>
-                  <a:pt x="178" y="491"/>
-                </a:cubicBezTo>
-                <a:cubicBezTo>
-                  <a:pt x="190" y="494"/>
-                  <a:pt x="195" y="486"/>
-                  <a:pt x="195" y="479"/>
-                </a:cubicBezTo>
-                <a:cubicBezTo>
-                  <a:pt x="195" y="473"/>
-                  <a:pt x="195" y="439"/>
-                  <a:pt x="195" y="418"/>
-                </a:cubicBezTo>
-                <a:cubicBezTo>
-                  <a:pt x="195" y="418"/>
-                  <a:pt x="125" y="433"/>
-                  <a:pt x="110" y="388"/>
-                </a:cubicBezTo>
-                <a:cubicBezTo>
-                  <a:pt x="110" y="388"/>
-                  <a:pt x="98" y="359"/>
-                  <a:pt x="82" y="351"/>
-                </a:cubicBezTo>
-                <a:cubicBezTo>
-                  <a:pt x="82" y="351"/>
-                  <a:pt x="59" y="336"/>
-                  <a:pt x="84" y="336"/>
-                </a:cubicBezTo>
-                <a:cubicBezTo>
-                  <a:pt x="84" y="336"/>
-                  <a:pt x="109" y="338"/>
-                  <a:pt x="122" y="362"/>
-                </a:cubicBezTo>
-                <a:cubicBezTo>
-                  <a:pt x="144" y="400"/>
-                  <a:pt x="181" y="389"/>
-                  <a:pt x="195" y="383"/>
-                </a:cubicBezTo>
-                <a:cubicBezTo>
-                  <a:pt x="197" y="367"/>
-                  <a:pt x="204" y="355"/>
-                  <a:pt x="211" y="349"/>
-                </a:cubicBezTo>
-                <a:cubicBezTo>
-                  <a:pt x="155" y="343"/>
-                  <a:pt x="99" y="335"/>
-                  <a:pt x="99" y="238"/>
-                </a:cubicBezTo>
-                <a:cubicBezTo>
-                  <a:pt x="99" y="211"/>
-                  <a:pt x="106" y="197"/>
-                  <a:pt x="122" y="179"/>
-                </a:cubicBezTo>
-                <a:cubicBezTo>
-                  <a:pt x="120" y="173"/>
-                  <a:pt x="111" y="146"/>
-                  <a:pt x="125" y="112"/>
-                </a:cubicBezTo>
-                <a:cubicBezTo>
-                  <a:pt x="146" y="105"/>
-                  <a:pt x="194" y="139"/>
-                  <a:pt x="194" y="139"/>
-                </a:cubicBezTo>
-                <a:cubicBezTo>
-                  <a:pt x="214" y="133"/>
-                  <a:pt x="236" y="130"/>
-                  <a:pt x="257" y="130"/>
-                </a:cubicBezTo>
-                <a:cubicBezTo>
-                  <a:pt x="278" y="130"/>
-                  <a:pt x="300" y="133"/>
-                  <a:pt x="320" y="139"/>
-                </a:cubicBezTo>
-                <a:cubicBezTo>
-                  <a:pt x="320" y="139"/>
-                  <a:pt x="368" y="105"/>
-                  <a:pt x="389" y="112"/>
-                </a:cubicBezTo>
-                <a:cubicBezTo>
-                  <a:pt x="402" y="146"/>
-                  <a:pt x="394" y="173"/>
-                  <a:pt x="391" y="179"/>
-                </a:cubicBezTo>
-                <a:cubicBezTo>
-                  <a:pt x="407" y="197"/>
-                  <a:pt x="417" y="211"/>
-                  <a:pt x="417" y="238"/>
-                </a:cubicBezTo>
-                <a:cubicBezTo>
-                  <a:pt x="417" y="335"/>
-                  <a:pt x="358" y="343"/>
-                  <a:pt x="302" y="349"/>
-                </a:cubicBezTo>
-                <a:cubicBezTo>
-                  <a:pt x="311" y="357"/>
-                  <a:pt x="319" y="372"/>
-                  <a:pt x="319" y="395"/>
-                </a:cubicBezTo>
-                <a:cubicBezTo>
-                  <a:pt x="319" y="429"/>
-                  <a:pt x="319" y="471"/>
-                  <a:pt x="319" y="479"/>
-                </a:cubicBezTo>
-                <a:cubicBezTo>
-                  <a:pt x="319" y="485"/>
-                  <a:pt x="324" y="493"/>
-                  <a:pt x="336" y="491"/>
-                </a:cubicBezTo>
-                <a:cubicBezTo>
-                  <a:pt x="436" y="458"/>
-                  <a:pt x="504" y="363"/>
-                  <a:pt x="504" y="252"/>
-                </a:cubicBezTo>
-                <a:cubicBezTo>
-                  <a:pt x="504" y="113"/>
-                  <a:pt x="392" y="8"/>
-                  <a:pt x="253" y="8"/>
-                </a:cubicBezTo>
-                <a:close/>
-              </a:path>
-              <a:path extrusionOk="0" h="512" w="512">
-                <a:moveTo>
-                  <a:pt x="105" y="353"/>
-                </a:moveTo>
-                <a:cubicBezTo>
-                  <a:pt x="104" y="354"/>
-                  <a:pt x="104" y="356"/>
-                  <a:pt x="106" y="358"/>
-                </a:cubicBezTo>
-                <a:cubicBezTo>
-                  <a:pt x="108" y="360"/>
-                  <a:pt x="110" y="360"/>
-                  <a:pt x="111" y="359"/>
-                </a:cubicBezTo>
-                <a:cubicBezTo>
-                  <a:pt x="112" y="358"/>
-                  <a:pt x="112" y="356"/>
-                  <a:pt x="110" y="354"/>
-                </a:cubicBezTo>
-                <a:cubicBezTo>
-                  <a:pt x="109" y="352"/>
-                  <a:pt x="107" y="352"/>
-                  <a:pt x="105" y="353"/>
-                </a:cubicBezTo>
-                <a:close/>
-              </a:path>
-              <a:path extrusionOk="0" h="512" w="512">
-                <a:moveTo>
-                  <a:pt x="94" y="345"/>
-                </a:moveTo>
-                <a:cubicBezTo>
-                  <a:pt x="94" y="346"/>
-                  <a:pt x="95" y="348"/>
-                  <a:pt x="97" y="349"/>
-                </a:cubicBezTo>
-                <a:cubicBezTo>
-                  <a:pt x="98" y="350"/>
-                  <a:pt x="100" y="349"/>
-                  <a:pt x="101" y="348"/>
-                </a:cubicBezTo>
-                <a:cubicBezTo>
-                  <a:pt x="102" y="347"/>
-                  <a:pt x="101" y="345"/>
-                  <a:pt x="99" y="344"/>
-                </a:cubicBezTo>
-                <a:cubicBezTo>
-                  <a:pt x="97" y="343"/>
-                  <a:pt x="95" y="344"/>
-                  <a:pt x="94" y="345"/>
-                </a:cubicBezTo>
-                <a:close/>
-              </a:path>
-              <a:path extrusionOk="0" h="512" w="512">
-                <a:moveTo>
-                  <a:pt x="127" y="380"/>
-                </a:moveTo>
-                <a:cubicBezTo>
-                  <a:pt x="125" y="382"/>
-                  <a:pt x="126" y="385"/>
-                  <a:pt x="128" y="387"/>
-                </a:cubicBezTo>
-                <a:cubicBezTo>
-                  <a:pt x="130" y="389"/>
-                  <a:pt x="133" y="389"/>
-                  <a:pt x="135" y="388"/>
-                </a:cubicBezTo>
-                <a:cubicBezTo>
-                  <a:pt x="136" y="386"/>
-                  <a:pt x="135" y="383"/>
-                  <a:pt x="133" y="381"/>
-                </a:cubicBezTo>
-                <a:cubicBezTo>
-                  <a:pt x="131" y="379"/>
-                  <a:pt x="128" y="379"/>
-                  <a:pt x="127" y="380"/>
-                </a:cubicBezTo>
-                <a:close/>
-              </a:path>
-              <a:path extrusionOk="0" h="512" w="512">
-                <a:moveTo>
-                  <a:pt x="115" y="366"/>
-                </a:moveTo>
-                <a:cubicBezTo>
-                  <a:pt x="114" y="367"/>
-                  <a:pt x="114" y="369"/>
-                  <a:pt x="115" y="372"/>
-                </a:cubicBezTo>
-                <a:cubicBezTo>
-                  <a:pt x="117" y="374"/>
-                  <a:pt x="120" y="375"/>
-                  <a:pt x="121" y="374"/>
-                </a:cubicBezTo>
-                <a:cubicBezTo>
-                  <a:pt x="123" y="373"/>
-                  <a:pt x="123" y="370"/>
-                  <a:pt x="121" y="368"/>
-                </a:cubicBezTo>
-                <a:cubicBezTo>
-                  <a:pt x="120" y="365"/>
-                  <a:pt x="117" y="364"/>
-                  <a:pt x="115" y="366"/>
-                </a:cubicBezTo>
-                <a:close/>
-              </a:path>
-            </a:pathLst>
-          </a:custGeom>
-          <a:solidFill>
-            <a:srgbClr val="781F18"/>
-          </a:solidFill>
-          <a:ln>
-            <a:noFill/>
-          </a:ln>
-        </p:spPr>
-        <p:txBody>
-          <a:bodyPr anchorCtr="0" anchor="ctr" bIns="91425" lIns="91425" spcFirstLastPara="1" rIns="91425" wrap="square" tIns="91425">
-            <a:noAutofit/>
-          </a:bodyPr>
-          <a:lstStyle/>
-          <a:p>
-            <a:pPr indent="0" lvl="0" marL="0" rtl="0" algn="l">
-              <a:spcBef>
-                <a:spcPts val="0"/>
-              </a:spcBef>
-              <a:spcAft>
-                <a:spcPts val="0"/>
-              </a:spcAft>
-              <a:buNone/>
-            </a:pPr>
-            <a:r>
-              <a:t/>
-            </a:r>
-            <a:endParaRPr/>
-          </a:p>
-        </p:txBody>
-      </p:sp>
-      <p:sp>
-        <p:nvSpPr>
-          <p:cNvPr id="218" name="Google Shape;218;p9"/>
-          <p:cNvSpPr txBox="1"/>
-          <p:nvPr/>
-        </p:nvSpPr>
-        <p:spPr>
-          <a:xfrm>
-            <a:off x="990600" y="1346200"/>
-            <a:ext cx="4826000" cy="254000"/>
-          </a:xfrm>
-          <a:prstGeom prst="rect">
-            <a:avLst/>
-          </a:prstGeom>
-          <a:noFill/>
-          <a:ln>
-            <a:noFill/>
-          </a:ln>
-        </p:spPr>
-        <p:txBody>
-          <a:bodyPr anchorCtr="0" anchor="t" bIns="0" lIns="0" spcFirstLastPara="1" rIns="0" wrap="square" tIns="0">
-            <a:noAutofit/>
-          </a:bodyPr>
-          <a:lstStyle/>
-          <a:p>
-            <a:pPr indent="0" lvl="0" marL="0" marR="0" rtl="0" algn="l">
-              <a:lnSpc>
-                <a:spcPct val="120000"/>
-              </a:lnSpc>
-              <a:spcBef>
-                <a:spcPts val="0"/>
-              </a:spcBef>
-              <a:spcAft>
-                <a:spcPts val="0"/>
-              </a:spcAft>
-              <a:buNone/>
-            </a:pPr>
-            <a:r>
-              <a:rPr b="1" i="0" lang="en-US" sz="1400" u="none" cap="none" strike="noStrike">
-                <a:solidFill>
-                  <a:srgbClr val="781F18"/>
-                </a:solidFill>
-                <a:latin typeface="Quattrocento Sans"/>
-                <a:ea typeface="Quattrocento Sans"/>
-                <a:cs typeface="Quattrocento Sans"/>
-                <a:sym typeface="Quattrocento Sans"/>
-              </a:rPr>
-              <a:t>Code — MIT license</a:t>
-            </a:r>
-            <a:endParaRPr b="0" i="0" sz="1400" u="none" cap="none" strike="noStrike"/>
-          </a:p>
-        </p:txBody>
-      </p:sp>
-      <p:sp>
-        <p:nvSpPr>
-          <p:cNvPr id="219" name="Google Shape;219;p9"/>
-          <p:cNvSpPr txBox="1"/>
-          <p:nvPr/>
-        </p:nvSpPr>
-        <p:spPr>
-          <a:xfrm>
-            <a:off x="609600" y="1651000"/>
-            <a:ext cx="5080000" cy="508000"/>
-          </a:xfrm>
-          <a:prstGeom prst="rect">
-            <a:avLst/>
-          </a:prstGeom>
-          <a:noFill/>
-          <a:ln>
-            <a:noFill/>
-          </a:ln>
-        </p:spPr>
-        <p:txBody>
-          <a:bodyPr anchorCtr="0" anchor="t" bIns="0" lIns="0" spcFirstLastPara="1" rIns="0" wrap="square" tIns="0">
-            <a:noAutofit/>
-          </a:bodyPr>
-          <a:lstStyle/>
-          <a:p>
-            <a:pPr indent="0" lvl="0" marL="0" marR="0" rtl="0" algn="l">
-              <a:lnSpc>
-                <a:spcPct val="135000"/>
-              </a:lnSpc>
-              <a:spcBef>
-                <a:spcPts val="0"/>
-              </a:spcBef>
-              <a:spcAft>
-                <a:spcPts val="0"/>
-              </a:spcAft>
-              <a:buNone/>
-            </a:pPr>
-            <a:r>
-              <a:rPr b="0" i="0" lang="en-US" sz="1200" u="sng" cap="none" strike="noStrike">
-                <a:solidFill>
-                  <a:schemeClr val="hlink"/>
-                </a:solidFill>
-                <a:latin typeface="Quattrocento Sans"/>
-                <a:ea typeface="Quattrocento Sans"/>
-                <a:cs typeface="Quattrocento Sans"/>
-                <a:sym typeface="Quattrocento Sans"/>
-                <a:hlinkClick r:id="rId3"/>
-              </a:rPr>
-              <a:t>github.com/microsoft/GenCodec</a:t>
-            </a:r>
-            <a:r>
-              <a:rPr b="0" i="0" lang="en-US" sz="1200" u="none" cap="none" strike="noStrike">
-                <a:solidFill>
-                  <a:srgbClr val="2B2320"/>
-                </a:solidFill>
-                <a:latin typeface="Quattrocento Sans"/>
-                <a:ea typeface="Quattrocento Sans"/>
-                <a:cs typeface="Quattrocento Sans"/>
-                <a:sym typeface="Quattrocento Sans"/>
-              </a:rPr>
-              <a:t> → PULSE: ~6.6k lines of Python + C++, including training entry points (train_mse.py, pulse-train-*).</a:t>
-            </a:r>
-            <a:endParaRPr b="0" i="0" sz="1200" u="none" cap="none" strike="noStrike"/>
-          </a:p>
-        </p:txBody>
-      </p:sp>
-      <p:sp>
-        <p:nvSpPr>
-          <p:cNvPr id="220" name="Google Shape;220;p9"/>
-          <p:cNvSpPr/>
-          <p:nvPr/>
-        </p:nvSpPr>
-        <p:spPr>
-          <a:xfrm>
-            <a:off x="609600" y="2336800"/>
-            <a:ext cx="254000" cy="254000"/>
-          </a:xfrm>
-          <a:custGeom>
-            <a:rect b="b" l="l" r="r" t="t"/>
-            <a:pathLst>
-              <a:path extrusionOk="0" h="512" w="512">
-                <a:moveTo>
-                  <a:pt x="224" y="-2"/>
-                </a:moveTo>
-                <a:cubicBezTo>
-                  <a:pt x="244" y="-14"/>
-                  <a:pt x="269" y="-14"/>
-                  <a:pt x="288" y="-2"/>
-                </a:cubicBezTo>
-                <a:lnTo>
-                  <a:pt x="464" y="99"/>
-                </a:lnTo>
-                <a:cubicBezTo>
-                  <a:pt x="484" y="110"/>
-                  <a:pt x="496" y="132"/>
-                  <a:pt x="496" y="154"/>
-                </a:cubicBezTo>
-                <a:lnTo>
-                  <a:pt x="496" y="357"/>
-                </a:lnTo>
-                <a:cubicBezTo>
-                  <a:pt x="496" y="380"/>
-                  <a:pt x="484" y="401"/>
-                  <a:pt x="464" y="413"/>
-                </a:cubicBezTo>
-                <a:lnTo>
-                  <a:pt x="288" y="515"/>
-                </a:lnTo>
-                <a:cubicBezTo>
-                  <a:pt x="269" y="526"/>
-                  <a:pt x="244" y="526"/>
-                  <a:pt x="224" y="515"/>
-                </a:cubicBezTo>
-                <a:lnTo>
-                  <a:pt x="49" y="413"/>
-                </a:lnTo>
-                <a:cubicBezTo>
-                  <a:pt x="29" y="402"/>
-                  <a:pt x="17" y="380"/>
-                  <a:pt x="17" y="358"/>
-                </a:cubicBezTo>
-                <a:lnTo>
-                  <a:pt x="17" y="155"/>
-                </a:lnTo>
-                <a:cubicBezTo>
-                  <a:pt x="17" y="132"/>
-                  <a:pt x="29" y="111"/>
-                  <a:pt x="49" y="99"/>
-                </a:cubicBezTo>
-                <a:lnTo>
-                  <a:pt x="224" y="-2"/>
-                </a:lnTo>
-                <a:close/>
-                <a:moveTo>
-                  <a:pt x="432" y="358"/>
-                </a:moveTo>
-                <a:lnTo>
-                  <a:pt x="432" y="191"/>
-                </a:lnTo>
-                <a:lnTo>
-                  <a:pt x="288" y="274"/>
-                </a:lnTo>
-                <a:lnTo>
-                  <a:pt x="288" y="441"/>
-                </a:lnTo>
-                <a:lnTo>
-                  <a:pt x="432" y="358"/>
-                </a:lnTo>
-                <a:close/>
-              </a:path>
-            </a:pathLst>
-          </a:custGeom>
-          <a:solidFill>
-            <a:srgbClr val="781F18"/>
-          </a:solidFill>
-          <a:ln>
-            <a:noFill/>
-          </a:ln>
-        </p:spPr>
-        <p:txBody>
-          <a:bodyPr anchorCtr="0" anchor="ctr" bIns="91425" lIns="91425" spcFirstLastPara="1" rIns="91425" wrap="square" tIns="91425">
-            <a:noAutofit/>
-          </a:bodyPr>
-          <a:lstStyle/>
-          <a:p>
-            <a:pPr indent="0" lvl="0" marL="0" rtl="0" algn="l">
-              <a:spcBef>
-                <a:spcPts val="0"/>
-              </a:spcBef>
-              <a:spcAft>
-                <a:spcPts val="0"/>
-              </a:spcAft>
-              <a:buNone/>
-            </a:pPr>
-            <a:r>
-              <a:t/>
-            </a:r>
-            <a:endParaRPr/>
-          </a:p>
-        </p:txBody>
-      </p:sp>
-      <p:sp>
-        <p:nvSpPr>
-          <p:cNvPr id="221" name="Google Shape;221;p9"/>
-          <p:cNvSpPr txBox="1"/>
-          <p:nvPr/>
-        </p:nvSpPr>
-        <p:spPr>
-          <a:xfrm>
-            <a:off x="990600" y="2336800"/>
-            <a:ext cx="4826000" cy="254000"/>
-          </a:xfrm>
-          <a:prstGeom prst="rect">
-            <a:avLst/>
-          </a:prstGeom>
-          <a:noFill/>
-          <a:ln>
-            <a:noFill/>
-          </a:ln>
-        </p:spPr>
-        <p:txBody>
-          <a:bodyPr anchorCtr="0" anchor="t" bIns="0" lIns="0" spcFirstLastPara="1" rIns="0" wrap="square" tIns="0">
-            <a:noAutofit/>
-          </a:bodyPr>
-          <a:lstStyle/>
-          <a:p>
-            <a:pPr indent="0" lvl="0" marL="0" marR="0" rtl="0" algn="l">
-              <a:lnSpc>
-                <a:spcPct val="120000"/>
-              </a:lnSpc>
-              <a:spcBef>
-                <a:spcPts val="0"/>
-              </a:spcBef>
-              <a:spcAft>
-                <a:spcPts val="0"/>
-              </a:spcAft>
-              <a:buNone/>
-            </a:pPr>
-            <a:r>
-              <a:rPr b="1" i="0" lang="en-US" sz="1400" u="none" cap="none" strike="noStrike">
-                <a:solidFill>
-                  <a:srgbClr val="781F18"/>
-                </a:solidFill>
-                <a:latin typeface="Quattrocento Sans"/>
-                <a:ea typeface="Quattrocento Sans"/>
-                <a:cs typeface="Quattrocento Sans"/>
-                <a:sym typeface="Quattrocento Sans"/>
-              </a:rPr>
-              <a:t>Weights — MIT license, 4 bundles</a:t>
-            </a:r>
-            <a:endParaRPr b="0" i="0" sz="1400" u="none" cap="none" strike="noStrike"/>
-          </a:p>
-        </p:txBody>
-      </p:sp>
-      <p:sp>
-        <p:nvSpPr>
-          <p:cNvPr id="222" name="Google Shape;222;p9"/>
-          <p:cNvSpPr txBox="1"/>
-          <p:nvPr/>
-        </p:nvSpPr>
-        <p:spPr>
-          <a:xfrm>
-            <a:off x="609600" y="2641600"/>
-            <a:ext cx="5080000" cy="1397000"/>
-          </a:xfrm>
-          <a:prstGeom prst="rect">
-            <a:avLst/>
-          </a:prstGeom>
-          <a:noFill/>
-          <a:ln>
-            <a:noFill/>
-          </a:ln>
-        </p:spPr>
-        <p:txBody>
-          <a:bodyPr anchorCtr="0" anchor="t" bIns="0" lIns="0" spcFirstLastPara="1" rIns="0" wrap="square" tIns="0">
-            <a:noAutofit/>
-          </a:bodyPr>
-          <a:lstStyle/>
-          <a:p>
-            <a:pPr indent="0" lvl="0" marL="0" marR="0" rtl="0" algn="l">
-              <a:lnSpc>
-                <a:spcPct val="140000"/>
-              </a:lnSpc>
-              <a:spcBef>
-                <a:spcPts val="0"/>
-              </a:spcBef>
-              <a:spcAft>
-                <a:spcPts val="0"/>
-              </a:spcAft>
-              <a:buNone/>
-            </a:pPr>
-            <a:r>
-              <a:rPr b="0" i="0" lang="en-US" sz="1200" u="sng" cap="none" strike="noStrike">
-                <a:solidFill>
-                  <a:schemeClr val="hlink"/>
-                </a:solidFill>
-                <a:latin typeface="Quattrocento Sans"/>
-                <a:ea typeface="Quattrocento Sans"/>
-                <a:cs typeface="Quattrocento Sans"/>
-                <a:sym typeface="Quattrocento Sans"/>
-                <a:hlinkClick r:id="rId4"/>
-              </a:rPr>
-              <a:t>huggingface.co/zhaoyangjia/PULSE</a:t>
-            </a:r>
-            <a:endParaRPr b="0" i="0" sz="1200" u="none" cap="none" strike="noStrike"/>
-          </a:p>
-          <a:p>
-            <a:pPr indent="0" lvl="0" marL="0" marR="0" rtl="0" algn="l">
-              <a:lnSpc>
-                <a:spcPct val="140000"/>
-              </a:lnSpc>
-              <a:spcBef>
-                <a:spcPts val="0"/>
-              </a:spcBef>
-              <a:spcAft>
-                <a:spcPts val="0"/>
-              </a:spcAft>
-              <a:buNone/>
-            </a:pPr>
-            <a:r>
-              <a:rPr b="0" i="0" lang="en-US" sz="1050" u="none" cap="none" strike="noStrike">
-                <a:solidFill>
-                  <a:srgbClr val="2B2320"/>
-                </a:solidFill>
-                <a:latin typeface="JetBrains Mono"/>
-                <a:ea typeface="JetBrains Mono"/>
-                <a:cs typeface="JetBrains Mono"/>
-                <a:sym typeface="JetBrains Mono"/>
-              </a:rPr>
-              <a:t>pulse-s-mse</a:t>
-            </a:r>
-            <a:r>
-              <a:rPr b="0" i="0" lang="en-US" sz="1200" u="none" cap="none" strike="noStrike">
-                <a:solidFill>
-                  <a:srgbClr val="2B2320"/>
-                </a:solidFill>
-                <a:latin typeface="Quattrocento Sans"/>
-                <a:ea typeface="Quattrocento Sans"/>
-                <a:cs typeface="Quattrocento Sans"/>
-                <a:sym typeface="Quattrocento Sans"/>
-              </a:rPr>
-              <a:t> — small receiver, tuned for PSNR</a:t>
-            </a:r>
-            <a:endParaRPr b="0" i="0" sz="1200" u="none" cap="none" strike="noStrike"/>
-          </a:p>
-          <a:p>
-            <a:pPr indent="0" lvl="0" marL="0" marR="0" rtl="0" algn="l">
-              <a:lnSpc>
-                <a:spcPct val="140000"/>
-              </a:lnSpc>
-              <a:spcBef>
-                <a:spcPts val="0"/>
-              </a:spcBef>
-              <a:spcAft>
-                <a:spcPts val="0"/>
-              </a:spcAft>
-              <a:buNone/>
-            </a:pPr>
-            <a:r>
-              <a:rPr b="0" i="0" lang="en-US" sz="1050" u="none" cap="none" strike="noStrike">
-                <a:solidFill>
-                  <a:srgbClr val="2B2320"/>
-                </a:solidFill>
-                <a:latin typeface="JetBrains Mono"/>
-                <a:ea typeface="JetBrains Mono"/>
-                <a:cs typeface="JetBrains Mono"/>
-                <a:sym typeface="JetBrains Mono"/>
-              </a:rPr>
-              <a:t>pulse-mse</a:t>
-            </a:r>
-            <a:r>
-              <a:rPr b="0" i="0" lang="en-US" sz="1200" u="none" cap="none" strike="noStrike">
-                <a:solidFill>
-                  <a:srgbClr val="2B2320"/>
-                </a:solidFill>
-                <a:latin typeface="Quattrocento Sans"/>
-                <a:ea typeface="Quattrocento Sans"/>
-                <a:cs typeface="Quattrocento Sans"/>
-                <a:sym typeface="Quattrocento Sans"/>
-              </a:rPr>
-              <a:t> — base receiver, tuned for PSNR</a:t>
-            </a:r>
-            <a:endParaRPr b="0" i="0" sz="1200" u="none" cap="none" strike="noStrike"/>
-          </a:p>
-          <a:p>
-            <a:pPr indent="0" lvl="0" marL="0" marR="0" rtl="0" algn="l">
-              <a:lnSpc>
-                <a:spcPct val="140000"/>
-              </a:lnSpc>
-              <a:spcBef>
-                <a:spcPts val="0"/>
-              </a:spcBef>
-              <a:spcAft>
-                <a:spcPts val="0"/>
-              </a:spcAft>
-              <a:buNone/>
-            </a:pPr>
-            <a:r>
-              <a:rPr b="0" i="0" lang="en-US" sz="1050" u="none" cap="none" strike="noStrike">
-                <a:solidFill>
-                  <a:srgbClr val="2B2320"/>
-                </a:solidFill>
-                <a:latin typeface="JetBrains Mono"/>
-                <a:ea typeface="JetBrains Mono"/>
-                <a:cs typeface="JetBrains Mono"/>
-                <a:sym typeface="JetBrains Mono"/>
-              </a:rPr>
-              <a:t>pulse-perceptual</a:t>
-            </a:r>
-            <a:r>
-              <a:rPr b="0" i="0" lang="en-US" sz="1200" u="none" cap="none" strike="noStrike">
-                <a:solidFill>
-                  <a:srgbClr val="2B2320"/>
-                </a:solidFill>
-                <a:latin typeface="Quattrocento Sans"/>
-                <a:ea typeface="Quattrocento Sans"/>
-                <a:cs typeface="Quattrocento Sans"/>
-                <a:sym typeface="Quattrocento Sans"/>
-              </a:rPr>
-              <a:t> — base receiver, tuned to look good</a:t>
-            </a:r>
-            <a:endParaRPr b="0" i="0" sz="1200" u="none" cap="none" strike="noStrike"/>
-          </a:p>
-          <a:p>
-            <a:pPr indent="0" lvl="0" marL="0" marR="0" rtl="0" algn="l">
-              <a:lnSpc>
-                <a:spcPct val="140000"/>
-              </a:lnSpc>
-              <a:spcBef>
-                <a:spcPts val="0"/>
-              </a:spcBef>
-              <a:spcAft>
-                <a:spcPts val="0"/>
-              </a:spcAft>
-              <a:buNone/>
-            </a:pPr>
-            <a:r>
-              <a:rPr b="0" i="0" lang="en-US" sz="1050" u="none" cap="none" strike="noStrike">
-                <a:solidFill>
-                  <a:srgbClr val="2B2320"/>
-                </a:solidFill>
-                <a:latin typeface="JetBrains Mono"/>
-                <a:ea typeface="JetBrains Mono"/>
-                <a:cs typeface="JetBrains Mono"/>
-                <a:sym typeface="JetBrains Mono"/>
-              </a:rPr>
-              <a:t>pulse-l-perceptual</a:t>
-            </a:r>
-            <a:r>
-              <a:rPr b="0" i="0" lang="en-US" sz="1200" u="none" cap="none" strike="noStrike">
-                <a:solidFill>
-                  <a:srgbClr val="2B2320"/>
-                </a:solidFill>
-                <a:latin typeface="Quattrocento Sans"/>
-                <a:ea typeface="Quattrocento Sans"/>
-                <a:cs typeface="Quattrocento Sans"/>
-                <a:sym typeface="Quattrocento Sans"/>
-              </a:rPr>
-              <a:t> — large receiver, perceptual</a:t>
-            </a:r>
-            <a:endParaRPr b="0" i="0" sz="1200" u="none" cap="none" strike="noStrike"/>
-          </a:p>
-        </p:txBody>
-      </p:sp>
-      <p:sp>
-        <p:nvSpPr>
-          <p:cNvPr id="223" name="Google Shape;223;p9"/>
-          <p:cNvSpPr/>
-          <p:nvPr/>
-        </p:nvSpPr>
-        <p:spPr>
-          <a:xfrm>
-            <a:off x="609600" y="4267200"/>
-            <a:ext cx="254000" cy="254000"/>
-          </a:xfrm>
-          <a:custGeom>
-            <a:rect b="b" l="l" r="r" t="t"/>
-            <a:pathLst>
-              <a:path extrusionOk="0" h="512" w="512">
-                <a:moveTo>
-                  <a:pt x="9" y="119"/>
-                </a:moveTo>
-                <a:cubicBezTo>
-                  <a:pt x="-3" y="106"/>
-                  <a:pt x="-3" y="86"/>
-                  <a:pt x="9" y="73"/>
-                </a:cubicBezTo>
-                <a:cubicBezTo>
-                  <a:pt x="22" y="61"/>
-                  <a:pt x="42" y="61"/>
-                  <a:pt x="55" y="73"/>
-                </a:cubicBezTo>
-                <a:lnTo>
-                  <a:pt x="215" y="233"/>
-                </a:lnTo>
-                <a:cubicBezTo>
-                  <a:pt x="227" y="246"/>
-                  <a:pt x="227" y="266"/>
-                  <a:pt x="215" y="279"/>
-                </a:cubicBezTo>
-                <a:lnTo>
-                  <a:pt x="55" y="439"/>
-                </a:lnTo>
-                <a:cubicBezTo>
-                  <a:pt x="42" y="451"/>
-                  <a:pt x="22" y="451"/>
-                  <a:pt x="9" y="439"/>
-                </a:cubicBezTo>
-                <a:cubicBezTo>
-                  <a:pt x="-3" y="426"/>
-                  <a:pt x="-3" y="406"/>
-                  <a:pt x="9" y="393"/>
-                </a:cubicBezTo>
-                <a:lnTo>
-                  <a:pt x="147" y="256"/>
-                </a:lnTo>
-                <a:lnTo>
-                  <a:pt x="9" y="119"/>
-                </a:lnTo>
-                <a:close/>
-                <a:moveTo>
-                  <a:pt x="224" y="384"/>
-                </a:moveTo>
-                <a:lnTo>
-                  <a:pt x="480" y="384"/>
-                </a:lnTo>
-                <a:cubicBezTo>
-                  <a:pt x="498" y="384"/>
-                  <a:pt x="512" y="398"/>
-                  <a:pt x="512" y="416"/>
-                </a:cubicBezTo>
-                <a:cubicBezTo>
-                  <a:pt x="512" y="434"/>
-                  <a:pt x="498" y="448"/>
-                  <a:pt x="480" y="448"/>
-                </a:cubicBezTo>
-                <a:lnTo>
-                  <a:pt x="224" y="448"/>
-                </a:lnTo>
-                <a:cubicBezTo>
-                  <a:pt x="206" y="448"/>
-                  <a:pt x="192" y="434"/>
-                  <a:pt x="192" y="416"/>
-                </a:cubicBezTo>
-                <a:cubicBezTo>
-                  <a:pt x="192" y="398"/>
-                  <a:pt x="206" y="384"/>
-                  <a:pt x="224" y="384"/>
-                </a:cubicBezTo>
-                <a:close/>
-              </a:path>
-            </a:pathLst>
-          </a:custGeom>
-          <a:solidFill>
-            <a:srgbClr val="781F18"/>
-          </a:solidFill>
-          <a:ln>
-            <a:noFill/>
-          </a:ln>
-        </p:spPr>
-        <p:txBody>
-          <a:bodyPr anchorCtr="0" anchor="ctr" bIns="91425" lIns="91425" spcFirstLastPara="1" rIns="91425" wrap="square" tIns="91425">
-            <a:noAutofit/>
-          </a:bodyPr>
-          <a:lstStyle/>
-          <a:p>
-            <a:pPr indent="0" lvl="0" marL="0" rtl="0" algn="l">
-              <a:spcBef>
-                <a:spcPts val="0"/>
-              </a:spcBef>
-              <a:spcAft>
-                <a:spcPts val="0"/>
-              </a:spcAft>
-              <a:buNone/>
-            </a:pPr>
-            <a:r>
-              <a:t/>
-            </a:r>
-            <a:endParaRPr/>
-          </a:p>
-        </p:txBody>
-      </p:sp>
-      <p:sp>
-        <p:nvSpPr>
-          <p:cNvPr id="224" name="Google Shape;224;p9"/>
-          <p:cNvSpPr txBox="1"/>
-          <p:nvPr/>
-        </p:nvSpPr>
-        <p:spPr>
-          <a:xfrm>
-            <a:off x="990600" y="4267200"/>
-            <a:ext cx="4826000" cy="254000"/>
-          </a:xfrm>
-          <a:prstGeom prst="rect">
-            <a:avLst/>
-          </a:prstGeom>
-          <a:noFill/>
-          <a:ln>
-            <a:noFill/>
-          </a:ln>
-        </p:spPr>
-        <p:txBody>
-          <a:bodyPr anchorCtr="0" anchor="t" bIns="0" lIns="0" spcFirstLastPara="1" rIns="0" wrap="square" tIns="0">
-            <a:noAutofit/>
-          </a:bodyPr>
-          <a:lstStyle/>
-          <a:p>
-            <a:pPr indent="0" lvl="0" marL="0" marR="0" rtl="0" algn="l">
-              <a:lnSpc>
-                <a:spcPct val="120000"/>
-              </a:lnSpc>
-              <a:spcBef>
-                <a:spcPts val="0"/>
-              </a:spcBef>
-              <a:spcAft>
-                <a:spcPts val="0"/>
-              </a:spcAft>
-              <a:buNone/>
-            </a:pPr>
-            <a:r>
-              <a:rPr b="1" i="0" lang="en-US" sz="1400" u="none" cap="none" strike="noStrike">
-                <a:solidFill>
-                  <a:srgbClr val="781F18"/>
-                </a:solidFill>
-                <a:latin typeface="Quattrocento Sans"/>
-                <a:ea typeface="Quattrocento Sans"/>
-                <a:cs typeface="Quattrocento Sans"/>
-                <a:sym typeface="Quattrocento Sans"/>
-              </a:rPr>
-              <a:t>Scripts</a:t>
-            </a:r>
-            <a:endParaRPr b="0" i="0" sz="1400" u="none" cap="none" strike="noStrike"/>
-          </a:p>
-        </p:txBody>
-      </p:sp>
-      <p:sp>
-        <p:nvSpPr>
-          <p:cNvPr id="225" name="Google Shape;225;p9"/>
-          <p:cNvSpPr txBox="1"/>
-          <p:nvPr/>
-        </p:nvSpPr>
-        <p:spPr>
-          <a:xfrm>
-            <a:off x="609600" y="4572000"/>
-            <a:ext cx="5080000" cy="1016000"/>
-          </a:xfrm>
-          <a:prstGeom prst="rect">
-            <a:avLst/>
-          </a:prstGeom>
-          <a:noFill/>
-          <a:ln>
-            <a:noFill/>
-          </a:ln>
-        </p:spPr>
-        <p:txBody>
-          <a:bodyPr anchorCtr="0" anchor="t" bIns="0" lIns="0" spcFirstLastPara="1" rIns="0" wrap="square" tIns="0">
-            <a:noAutofit/>
-          </a:bodyPr>
-          <a:lstStyle/>
-          <a:p>
-            <a:pPr indent="0" lvl="0" marL="0" marR="0" rtl="0" algn="l">
-              <a:lnSpc>
-                <a:spcPct val="140000"/>
-              </a:lnSpc>
-              <a:spcBef>
-                <a:spcPts val="0"/>
-              </a:spcBef>
-              <a:spcAft>
-                <a:spcPts val="0"/>
-              </a:spcAft>
-              <a:buNone/>
-            </a:pPr>
-            <a:r>
-              <a:rPr b="0" i="0" lang="en-US" sz="1050" u="none" cap="none" strike="noStrike">
-                <a:solidFill>
-                  <a:srgbClr val="2B2320"/>
-                </a:solidFill>
-                <a:latin typeface="JetBrains Mono"/>
-                <a:ea typeface="JetBrains Mono"/>
-                <a:cs typeface="JetBrains Mono"/>
-                <a:sym typeface="JetBrains Mono"/>
-              </a:rPr>
-              <a:t>download_models.py · compress.py · decompress.py · evaluate.py</a:t>
-            </a:r>
-            <a:endParaRPr b="0" i="0" sz="1200" u="none" cap="none" strike="noStrike"/>
-          </a:p>
-          <a:p>
-            <a:pPr indent="0" lvl="0" marL="0" marR="0" rtl="0" algn="l">
-              <a:lnSpc>
-                <a:spcPct val="140000"/>
-              </a:lnSpc>
-              <a:spcBef>
-                <a:spcPts val="0"/>
-              </a:spcBef>
-              <a:spcAft>
-                <a:spcPts val="0"/>
-              </a:spcAft>
-              <a:buNone/>
-            </a:pPr>
-            <a:r>
-              <a:rPr b="0" i="0" lang="en-US" sz="1200" u="none" cap="none" strike="noStrike">
-                <a:solidFill>
-                  <a:srgbClr val="2B2320"/>
-                </a:solidFill>
-                <a:latin typeface="Quattrocento Sans"/>
-                <a:ea typeface="Quattrocento Sans"/>
-                <a:cs typeface="Quattrocento Sans"/>
-                <a:sym typeface="Quattrocento Sans"/>
-              </a:rPr>
-              <a:t>evaluate.py reports per-QP bpp, PSNR, encode/decode ms, optional LPIPS / DISTS / FID.</a:t>
-            </a:r>
-            <a:endParaRPr b="0" i="0" sz="1200" u="none" cap="none" strike="noStrike"/>
-          </a:p>
-        </p:txBody>
-      </p:sp>
-      <p:sp>
-        <p:nvSpPr>
-          <p:cNvPr id="226" name="Google Shape;226;p9"/>
-          <p:cNvSpPr/>
-          <p:nvPr/>
-        </p:nvSpPr>
-        <p:spPr>
-          <a:xfrm>
-            <a:off x="5994400" y="1346200"/>
-            <a:ext cx="12700" cy="4521200"/>
-          </a:xfrm>
-          <a:custGeom>
-            <a:rect b="b" l="l" r="r" t="t"/>
-            <a:pathLst>
-              <a:path extrusionOk="0" h="356" w="1">
+              <a:path extrusionOk="0" h="1" w="864">
                 <a:moveTo>
                   <a:pt x="0" y="0"/>
                 </a:moveTo>
                 <a:lnTo>
-                  <a:pt x="0" y="356"/>
+                  <a:pt x="864" y="0"/>
                 </a:lnTo>
               </a:path>
             </a:pathLst>
@@ -15537,63 +14438,14 @@
       </p:sp>
       <p:sp>
         <p:nvSpPr>
-          <p:cNvPr id="227" name="Google Shape;227;p9"/>
-          <p:cNvSpPr/>
-          <p:nvPr/>
-        </p:nvSpPr>
-        <p:spPr>
-          <a:xfrm>
-            <a:off x="6350000" y="1346200"/>
-            <a:ext cx="5232400" cy="1625600"/>
-          </a:xfrm>
-          <a:prstGeom prst="rect">
-            <a:avLst/>
-          </a:prstGeom>
-          <a:solidFill>
-            <a:srgbClr val="EFE8D5"/>
-          </a:solidFill>
-          <a:ln cap="flat" cmpd="sng" w="12700">
-            <a:solidFill>
-              <a:srgbClr val="DDD4C0"/>
-            </a:solidFill>
-            <a:prstDash val="solid"/>
-            <a:round/>
-            <a:headEnd len="sm" w="sm" type="none"/>
-            <a:tailEnd len="sm" w="sm" type="none"/>
-          </a:ln>
-        </p:spPr>
-        <p:txBody>
-          <a:bodyPr anchorCtr="0" anchor="ctr" bIns="91425" lIns="91425" spcFirstLastPara="1" rIns="91425" wrap="square" tIns="91425">
-            <a:noAutofit/>
-          </a:bodyPr>
-          <a:lstStyle/>
-          <a:p>
-            <a:pPr indent="0" lvl="0" marL="0" rtl="0" algn="l">
-              <a:spcBef>
-                <a:spcPts val="0"/>
-              </a:spcBef>
-              <a:spcAft>
-                <a:spcPts val="0"/>
-              </a:spcAft>
-              <a:buNone/>
-            </a:pPr>
-            <a:r>
-              <a:t/>
-            </a:r>
-            <a:endParaRPr/>
-          </a:p>
-        </p:txBody>
-      </p:sp>
-      <p:sp>
-        <p:nvSpPr>
-          <p:cNvPr id="228" name="Google Shape;228;p9"/>
+          <p:cNvPr id="218" name="Google Shape;218;p9"/>
           <p:cNvSpPr txBox="1"/>
           <p:nvPr/>
         </p:nvSpPr>
         <p:spPr>
           <a:xfrm>
-            <a:off x="6553200" y="1447800"/>
-            <a:ext cx="4902200" cy="1447800"/>
+            <a:off x="609600" y="6553200"/>
+            <a:ext cx="6350000" cy="177800"/>
           </a:xfrm>
           <a:prstGeom prst="rect">
             <a:avLst/>
@@ -15611,7 +14463,7 @@
           <a:p>
             <a:pPr indent="0" lvl="0" marL="0" marR="0" rtl="0" algn="l">
               <a:lnSpc>
-                <a:spcPct val="150000"/>
+                <a:spcPct val="130000"/>
               </a:lnSpc>
               <a:spcBef>
                 <a:spcPts val="0"/>
@@ -15622,1332 +14474,15 @@
               <a:buNone/>
             </a:pPr>
             <a:r>
-              <a:rPr b="1" i="0" lang="en-US" sz="1000" u="none" cap="none" strike="noStrike">
-                <a:solidFill>
-                  <a:srgbClr val="2B2320"/>
-                </a:solidFill>
-                <a:latin typeface="JetBrains Mono"/>
-                <a:ea typeface="JetBrains Mono"/>
-                <a:cs typeface="JetBrains Mono"/>
-                <a:sym typeface="JetBrains Mono"/>
-              </a:rPr>
-              <a:t>pulse-mse/</a:t>
-            </a:r>
-            <a:r>
               <a:rPr b="0" i="0" lang="en-US" sz="1000" u="none" cap="none" strike="noStrike">
                 <a:solidFill>
-                  <a:srgbClr val="2B2320"/>
-                </a:solidFill>
-                <a:latin typeface="JetBrains Mono"/>
-                <a:ea typeface="JetBrains Mono"/>
-                <a:cs typeface="JetBrains Mono"/>
-                <a:sym typeface="JetBrains Mono"/>
-              </a:rPr>
-              <a:t>← every bundle has the same shape</a:t>
-            </a:r>
-            <a:endParaRPr b="0" i="0" sz="1000" u="none" cap="none" strike="noStrike"/>
-          </a:p>
-          <a:p>
-            <a:pPr indent="0" lvl="0" marL="0" marR="0" rtl="0" algn="l">
-              <a:lnSpc>
-                <a:spcPct val="150000"/>
-              </a:lnSpc>
-              <a:spcBef>
-                <a:spcPts val="0"/>
-              </a:spcBef>
-              <a:spcAft>
-                <a:spcPts val="0"/>
-              </a:spcAft>
-              <a:buNone/>
-            </a:pPr>
-            <a:r>
-              <a:rPr b="0" i="0" lang="en-US" sz="1000" u="none" cap="none" strike="noStrike">
-                <a:solidFill>
-                  <a:srgbClr val="2B2320"/>
-                </a:solidFill>
-                <a:latin typeface="JetBrains Mono"/>
-                <a:ea typeface="JetBrains Mono"/>
-                <a:cs typeface="JetBrains Mono"/>
-                <a:sym typeface="JetBrains Mono"/>
-              </a:rPr>
-              <a:t>├─ config.json</a:t>
-            </a:r>
-            <a:endParaRPr b="0" i="0" sz="1000" u="none" cap="none" strike="noStrike"/>
-          </a:p>
-          <a:p>
-            <a:pPr indent="0" lvl="0" marL="0" marR="0" rtl="0" algn="l">
-              <a:lnSpc>
-                <a:spcPct val="150000"/>
-              </a:lnSpc>
-              <a:spcBef>
-                <a:spcPts val="0"/>
-              </a:spcBef>
-              <a:spcAft>
-                <a:spcPts val="0"/>
-              </a:spcAft>
-              <a:buNone/>
-            </a:pPr>
-            <a:r>
-              <a:rPr b="0" i="0" lang="en-US" sz="1000" u="none" cap="none" strike="noStrike">
-                <a:solidFill>
-                  <a:srgbClr val="2B2320"/>
-                </a:solidFill>
-                <a:latin typeface="JetBrains Mono"/>
-                <a:ea typeface="JetBrains Mono"/>
-                <a:cs typeface="JetBrains Mono"/>
-                <a:sym typeface="JetBrains Mono"/>
-              </a:rPr>
-              <a:t>├─ model.pt</a:t>
-            </a:r>
-            <a:r>
-              <a:rPr b="0" i="0" lang="en-US" sz="1000" u="none" cap="none" strike="noStrike">
-                <a:solidFill>
                   <a:srgbClr val="857C6C"/>
-                </a:solidFill>
-                <a:latin typeface="JetBrains Mono"/>
-                <a:ea typeface="JetBrains Mono"/>
-                <a:cs typeface="JetBrains Mono"/>
-                <a:sym typeface="JetBrains Mono"/>
-              </a:rPr>
-              <a:t># float networks</a:t>
-            </a:r>
-            <a:endParaRPr b="0" i="0" sz="1000" u="none" cap="none" strike="noStrike"/>
-          </a:p>
-          <a:p>
-            <a:pPr indent="0" lvl="0" marL="0" marR="0" rtl="0" algn="l">
-              <a:lnSpc>
-                <a:spcPct val="150000"/>
-              </a:lnSpc>
-              <a:spcBef>
-                <a:spcPts val="0"/>
-              </a:spcBef>
-              <a:spcAft>
-                <a:spcPts val="0"/>
-              </a:spcAft>
-              <a:buNone/>
-            </a:pPr>
-            <a:r>
-              <a:rPr b="0" i="0" lang="en-US" sz="1000" u="none" cap="none" strike="noStrike">
-                <a:solidFill>
-                  <a:srgbClr val="2B2320"/>
-                </a:solidFill>
-                <a:latin typeface="JetBrains Mono"/>
-                <a:ea typeface="JetBrains Mono"/>
-                <a:cs typeface="JetBrains Mono"/>
-                <a:sym typeface="JetBrains Mono"/>
-              </a:rPr>
-              <a:t>├─ entropy_control_int.pt</a:t>
-            </a:r>
-            <a:r>
-              <a:rPr b="0" i="0" lang="en-US" sz="1000" u="none" cap="none" strike="noStrike">
-                <a:solidFill>
-                  <a:srgbClr val="857C6C"/>
-                </a:solidFill>
-                <a:latin typeface="JetBrains Mono"/>
-                <a:ea typeface="JetBrains Mono"/>
-                <a:cs typeface="JetBrains Mono"/>
-                <a:sym typeface="JetBrains Mono"/>
-              </a:rPr>
-              <a:t># INT8 probability layer</a:t>
-            </a:r>
-            <a:endParaRPr b="0" i="0" sz="1000" u="none" cap="none" strike="noStrike"/>
-          </a:p>
-          <a:p>
-            <a:pPr indent="0" lvl="0" marL="0" marR="0" rtl="0" algn="l">
-              <a:lnSpc>
-                <a:spcPct val="150000"/>
-              </a:lnSpc>
-              <a:spcBef>
-                <a:spcPts val="0"/>
-              </a:spcBef>
-              <a:spcAft>
-                <a:spcPts val="0"/>
-              </a:spcAft>
-              <a:buNone/>
-            </a:pPr>
-            <a:r>
-              <a:rPr b="0" i="0" lang="en-US" sz="1000" u="none" cap="none" strike="noStrike">
-                <a:solidFill>
-                  <a:srgbClr val="2B2320"/>
-                </a:solidFill>
-                <a:latin typeface="JetBrains Mono"/>
-                <a:ea typeface="JetBrains Mono"/>
-                <a:cs typeface="JetBrains Mono"/>
-                <a:sym typeface="JetBrains Mono"/>
-              </a:rPr>
-              <a:t>├─ manifest.json</a:t>
-            </a:r>
-            <a:endParaRPr b="0" i="0" sz="1000" u="none" cap="none" strike="noStrike"/>
-          </a:p>
-          <a:p>
-            <a:pPr indent="0" lvl="0" marL="0" marR="0" rtl="0" algn="l">
-              <a:lnSpc>
-                <a:spcPct val="150000"/>
-              </a:lnSpc>
-              <a:spcBef>
-                <a:spcPts val="0"/>
-              </a:spcBef>
-              <a:spcAft>
-                <a:spcPts val="0"/>
-              </a:spcAft>
-              <a:buNone/>
-            </a:pPr>
-            <a:r>
-              <a:rPr b="0" i="0" lang="en-US" sz="1000" u="none" cap="none" strike="noStrike">
-                <a:solidFill>
-                  <a:srgbClr val="2B2320"/>
-                </a:solidFill>
-                <a:latin typeface="JetBrains Mono"/>
-                <a:ea typeface="JetBrains Mono"/>
-                <a:cs typeface="JetBrains Mono"/>
-                <a:sym typeface="JetBrains Mono"/>
-              </a:rPr>
-              <a:t>└─ SHA256SUMS</a:t>
-            </a:r>
-            <a:r>
-              <a:rPr b="0" i="0" lang="en-US" sz="1000" u="none" cap="none" strike="noStrike">
-                <a:solidFill>
-                  <a:srgbClr val="857C6C"/>
-                </a:solidFill>
-                <a:latin typeface="JetBrains Mono"/>
-                <a:ea typeface="JetBrains Mono"/>
-                <a:cs typeface="JetBrains Mono"/>
-                <a:sym typeface="JetBrains Mono"/>
-              </a:rPr>
-              <a:t># file fingerprints</a:t>
-            </a:r>
-            <a:endParaRPr b="0" i="0" sz="1000" u="none" cap="none" strike="noStrike"/>
-          </a:p>
-        </p:txBody>
-      </p:sp>
-      <p:sp>
-        <p:nvSpPr>
-          <p:cNvPr id="229" name="Google Shape;229;p9"/>
-          <p:cNvSpPr txBox="1"/>
-          <p:nvPr/>
-        </p:nvSpPr>
-        <p:spPr>
-          <a:xfrm>
-            <a:off x="6350000" y="3200400"/>
-            <a:ext cx="5232400" cy="254000"/>
-          </a:xfrm>
-          <a:prstGeom prst="rect">
-            <a:avLst/>
-          </a:prstGeom>
-          <a:noFill/>
-          <a:ln>
-            <a:noFill/>
-          </a:ln>
-        </p:spPr>
-        <p:txBody>
-          <a:bodyPr anchorCtr="0" anchor="t" bIns="0" lIns="0" spcFirstLastPara="1" rIns="0" wrap="square" tIns="0">
-            <a:noAutofit/>
-          </a:bodyPr>
-          <a:lstStyle/>
-          <a:p>
-            <a:pPr indent="0" lvl="0" marL="0" marR="0" rtl="0" algn="l">
-              <a:lnSpc>
-                <a:spcPct val="120000"/>
-              </a:lnSpc>
-              <a:spcBef>
-                <a:spcPts val="0"/>
-              </a:spcBef>
-              <a:spcAft>
-                <a:spcPts val="0"/>
-              </a:spcAft>
-              <a:buNone/>
-            </a:pPr>
-            <a:r>
-              <a:rPr b="1" i="0" lang="en-US" sz="1400" u="none" cap="none" strike="noStrike">
-                <a:solidFill>
-                  <a:srgbClr val="781F18"/>
                 </a:solidFill>
                 <a:latin typeface="Quattrocento Sans"/>
                 <a:ea typeface="Quattrocento Sans"/>
                 <a:cs typeface="Quattrocento Sans"/>
                 <a:sym typeface="Quattrocento Sans"/>
               </a:rPr>
-              <a:t>Three ready-made runtimes</a:t>
-            </a:r>
-            <a:endParaRPr b="0" i="0" sz="1400" u="none" cap="none" strike="noStrike"/>
-          </a:p>
-        </p:txBody>
-      </p:sp>
-      <p:sp>
-        <p:nvSpPr>
-          <p:cNvPr id="230" name="Google Shape;230;p9"/>
-          <p:cNvSpPr/>
-          <p:nvPr/>
-        </p:nvSpPr>
-        <p:spPr>
-          <a:xfrm>
-            <a:off x="6350000" y="3606800"/>
-            <a:ext cx="279400" cy="279400"/>
-          </a:xfrm>
-          <a:custGeom>
-            <a:rect b="b" l="l" r="r" t="t"/>
-            <a:pathLst>
-              <a:path extrusionOk="0" h="512" w="512">
-                <a:moveTo>
-                  <a:pt x="176" y="24"/>
-                </a:moveTo>
-                <a:cubicBezTo>
-                  <a:pt x="176" y="11"/>
-                  <a:pt x="165" y="0"/>
-                  <a:pt x="152" y="0"/>
-                </a:cubicBezTo>
-                <a:cubicBezTo>
-                  <a:pt x="139" y="0"/>
-                  <a:pt x="128" y="11"/>
-                  <a:pt x="128" y="24"/>
-                </a:cubicBezTo>
-                <a:lnTo>
-                  <a:pt x="128" y="64"/>
-                </a:lnTo>
-                <a:cubicBezTo>
-                  <a:pt x="93" y="64"/>
-                  <a:pt x="64" y="93"/>
-                  <a:pt x="64" y="128"/>
-                </a:cubicBezTo>
-                <a:lnTo>
-                  <a:pt x="24" y="128"/>
-                </a:lnTo>
-                <a:cubicBezTo>
-                  <a:pt x="11" y="128"/>
-                  <a:pt x="0" y="139"/>
-                  <a:pt x="0" y="152"/>
-                </a:cubicBezTo>
-                <a:cubicBezTo>
-                  <a:pt x="0" y="165"/>
-                  <a:pt x="11" y="176"/>
-                  <a:pt x="24" y="176"/>
-                </a:cubicBezTo>
-                <a:lnTo>
-                  <a:pt x="64" y="176"/>
-                </a:lnTo>
-                <a:lnTo>
-                  <a:pt x="64" y="232"/>
-                </a:lnTo>
-                <a:lnTo>
-                  <a:pt x="24" y="232"/>
-                </a:lnTo>
-                <a:cubicBezTo>
-                  <a:pt x="11" y="232"/>
-                  <a:pt x="0" y="243"/>
-                  <a:pt x="0" y="256"/>
-                </a:cubicBezTo>
-                <a:cubicBezTo>
-                  <a:pt x="0" y="269"/>
-                  <a:pt x="11" y="280"/>
-                  <a:pt x="24" y="280"/>
-                </a:cubicBezTo>
-                <a:lnTo>
-                  <a:pt x="64" y="280"/>
-                </a:lnTo>
-                <a:lnTo>
-                  <a:pt x="64" y="336"/>
-                </a:lnTo>
-                <a:lnTo>
-                  <a:pt x="24" y="336"/>
-                </a:lnTo>
-                <a:cubicBezTo>
-                  <a:pt x="11" y="336"/>
-                  <a:pt x="0" y="347"/>
-                  <a:pt x="0" y="360"/>
-                </a:cubicBezTo>
-                <a:cubicBezTo>
-                  <a:pt x="0" y="373"/>
-                  <a:pt x="11" y="384"/>
-                  <a:pt x="24" y="384"/>
-                </a:cubicBezTo>
-                <a:lnTo>
-                  <a:pt x="64" y="384"/>
-                </a:lnTo>
-                <a:cubicBezTo>
-                  <a:pt x="64" y="419"/>
-                  <a:pt x="93" y="448"/>
-                  <a:pt x="128" y="448"/>
-                </a:cubicBezTo>
-                <a:lnTo>
-                  <a:pt x="128" y="488"/>
-                </a:lnTo>
-                <a:cubicBezTo>
-                  <a:pt x="128" y="501"/>
-                  <a:pt x="139" y="512"/>
-                  <a:pt x="152" y="512"/>
-                </a:cubicBezTo>
-                <a:cubicBezTo>
-                  <a:pt x="165" y="512"/>
-                  <a:pt x="176" y="501"/>
-                  <a:pt x="176" y="488"/>
-                </a:cubicBezTo>
-                <a:lnTo>
-                  <a:pt x="176" y="448"/>
-                </a:lnTo>
-                <a:lnTo>
-                  <a:pt x="232" y="448"/>
-                </a:lnTo>
-                <a:lnTo>
-                  <a:pt x="232" y="488"/>
-                </a:lnTo>
-                <a:cubicBezTo>
-                  <a:pt x="232" y="501"/>
-                  <a:pt x="243" y="512"/>
-                  <a:pt x="256" y="512"/>
-                </a:cubicBezTo>
-                <a:cubicBezTo>
-                  <a:pt x="269" y="512"/>
-                  <a:pt x="280" y="501"/>
-                  <a:pt x="280" y="488"/>
-                </a:cubicBezTo>
-                <a:lnTo>
-                  <a:pt x="280" y="448"/>
-                </a:lnTo>
-                <a:lnTo>
-                  <a:pt x="336" y="448"/>
-                </a:lnTo>
-                <a:lnTo>
-                  <a:pt x="336" y="488"/>
-                </a:lnTo>
-                <a:cubicBezTo>
-                  <a:pt x="336" y="501"/>
-                  <a:pt x="347" y="512"/>
-                  <a:pt x="360" y="512"/>
-                </a:cubicBezTo>
-                <a:cubicBezTo>
-                  <a:pt x="373" y="512"/>
-                  <a:pt x="384" y="501"/>
-                  <a:pt x="384" y="488"/>
-                </a:cubicBezTo>
-                <a:lnTo>
-                  <a:pt x="384" y="448"/>
-                </a:lnTo>
-                <a:cubicBezTo>
-                  <a:pt x="419" y="448"/>
-                  <a:pt x="448" y="419"/>
-                  <a:pt x="448" y="384"/>
-                </a:cubicBezTo>
-                <a:lnTo>
-                  <a:pt x="488" y="384"/>
-                </a:lnTo>
-                <a:cubicBezTo>
-                  <a:pt x="501" y="384"/>
-                  <a:pt x="512" y="373"/>
-                  <a:pt x="512" y="360"/>
-                </a:cubicBezTo>
-                <a:cubicBezTo>
-                  <a:pt x="512" y="347"/>
-                  <a:pt x="501" y="336"/>
-                  <a:pt x="488" y="336"/>
-                </a:cubicBezTo>
-                <a:lnTo>
-                  <a:pt x="448" y="336"/>
-                </a:lnTo>
-                <a:lnTo>
-                  <a:pt x="448" y="280"/>
-                </a:lnTo>
-                <a:lnTo>
-                  <a:pt x="488" y="280"/>
-                </a:lnTo>
-                <a:cubicBezTo>
-                  <a:pt x="501" y="280"/>
-                  <a:pt x="512" y="269"/>
-                  <a:pt x="512" y="256"/>
-                </a:cubicBezTo>
-                <a:cubicBezTo>
-                  <a:pt x="512" y="243"/>
-                  <a:pt x="501" y="232"/>
-                  <a:pt x="488" y="232"/>
-                </a:cubicBezTo>
-                <a:lnTo>
-                  <a:pt x="448" y="232"/>
-                </a:lnTo>
-                <a:lnTo>
-                  <a:pt x="448" y="176"/>
-                </a:lnTo>
-                <a:lnTo>
-                  <a:pt x="488" y="176"/>
-                </a:lnTo>
-                <a:cubicBezTo>
-                  <a:pt x="501" y="176"/>
-                  <a:pt x="512" y="165"/>
-                  <a:pt x="512" y="152"/>
-                </a:cubicBezTo>
-                <a:cubicBezTo>
-                  <a:pt x="512" y="139"/>
-                  <a:pt x="501" y="128"/>
-                  <a:pt x="488" y="128"/>
-                </a:cubicBezTo>
-                <a:lnTo>
-                  <a:pt x="448" y="128"/>
-                </a:lnTo>
-                <a:cubicBezTo>
-                  <a:pt x="448" y="93"/>
-                  <a:pt x="419" y="64"/>
-                  <a:pt x="384" y="64"/>
-                </a:cubicBezTo>
-                <a:lnTo>
-                  <a:pt x="384" y="24"/>
-                </a:lnTo>
-                <a:cubicBezTo>
-                  <a:pt x="384" y="11"/>
-                  <a:pt x="373" y="0"/>
-                  <a:pt x="360" y="0"/>
-                </a:cubicBezTo>
-                <a:cubicBezTo>
-                  <a:pt x="347" y="0"/>
-                  <a:pt x="336" y="11"/>
-                  <a:pt x="336" y="24"/>
-                </a:cubicBezTo>
-                <a:lnTo>
-                  <a:pt x="336" y="64"/>
-                </a:lnTo>
-                <a:lnTo>
-                  <a:pt x="280" y="64"/>
-                </a:lnTo>
-                <a:lnTo>
-                  <a:pt x="280" y="24"/>
-                </a:lnTo>
-                <a:cubicBezTo>
-                  <a:pt x="280" y="11"/>
-                  <a:pt x="269" y="0"/>
-                  <a:pt x="256" y="0"/>
-                </a:cubicBezTo>
-                <a:cubicBezTo>
-                  <a:pt x="243" y="0"/>
-                  <a:pt x="232" y="11"/>
-                  <a:pt x="232" y="24"/>
-                </a:cubicBezTo>
-                <a:lnTo>
-                  <a:pt x="232" y="64"/>
-                </a:lnTo>
-                <a:lnTo>
-                  <a:pt x="176" y="64"/>
-                </a:lnTo>
-                <a:lnTo>
-                  <a:pt x="176" y="24"/>
-                </a:lnTo>
-                <a:close/>
-                <a:moveTo>
-                  <a:pt x="160" y="128"/>
-                </a:moveTo>
-                <a:lnTo>
-                  <a:pt x="352" y="128"/>
-                </a:lnTo>
-                <a:cubicBezTo>
-                  <a:pt x="370" y="128"/>
-                  <a:pt x="384" y="142"/>
-                  <a:pt x="384" y="160"/>
-                </a:cubicBezTo>
-                <a:lnTo>
-                  <a:pt x="384" y="352"/>
-                </a:lnTo>
-                <a:cubicBezTo>
-                  <a:pt x="384" y="370"/>
-                  <a:pt x="370" y="384"/>
-                  <a:pt x="352" y="384"/>
-                </a:cubicBezTo>
-                <a:lnTo>
-                  <a:pt x="160" y="384"/>
-                </a:lnTo>
-                <a:cubicBezTo>
-                  <a:pt x="142" y="384"/>
-                  <a:pt x="128" y="370"/>
-                  <a:pt x="128" y="352"/>
-                </a:cubicBezTo>
-                <a:lnTo>
-                  <a:pt x="128" y="160"/>
-                </a:lnTo>
-                <a:cubicBezTo>
-                  <a:pt x="128" y="142"/>
-                  <a:pt x="142" y="128"/>
-                  <a:pt x="160" y="128"/>
-                </a:cubicBezTo>
-                <a:close/>
-              </a:path>
-              <a:path extrusionOk="0" h="512" w="512">
-                <a:moveTo>
-                  <a:pt x="176" y="176"/>
-                </a:moveTo>
-                <a:lnTo>
-                  <a:pt x="176" y="336"/>
-                </a:lnTo>
-                <a:lnTo>
-                  <a:pt x="336" y="336"/>
-                </a:lnTo>
-                <a:lnTo>
-                  <a:pt x="336" y="176"/>
-                </a:lnTo>
-                <a:lnTo>
-                  <a:pt x="176" y="176"/>
-                </a:lnTo>
-                <a:close/>
-              </a:path>
-            </a:pathLst>
-          </a:custGeom>
-          <a:solidFill>
-            <a:srgbClr val="A87B2B"/>
-          </a:solidFill>
-          <a:ln>
-            <a:noFill/>
-          </a:ln>
-        </p:spPr>
-        <p:txBody>
-          <a:bodyPr anchorCtr="0" anchor="ctr" bIns="91425" lIns="91425" spcFirstLastPara="1" rIns="91425" wrap="square" tIns="91425">
-            <a:noAutofit/>
-          </a:bodyPr>
-          <a:lstStyle/>
-          <a:p>
-            <a:pPr indent="0" lvl="0" marL="0" rtl="0" algn="l">
-              <a:spcBef>
-                <a:spcPts val="0"/>
-              </a:spcBef>
-              <a:spcAft>
-                <a:spcPts val="0"/>
-              </a:spcAft>
-              <a:buNone/>
-            </a:pPr>
-            <a:r>
-              <a:t/>
-            </a:r>
-            <a:endParaRPr/>
-          </a:p>
-        </p:txBody>
-      </p:sp>
-      <p:sp>
-        <p:nvSpPr>
-          <p:cNvPr id="231" name="Google Shape;231;p9"/>
-          <p:cNvSpPr txBox="1"/>
-          <p:nvPr/>
-        </p:nvSpPr>
-        <p:spPr>
-          <a:xfrm>
-            <a:off x="6781800" y="3556000"/>
-            <a:ext cx="4800600" cy="558800"/>
-          </a:xfrm>
-          <a:prstGeom prst="rect">
-            <a:avLst/>
-          </a:prstGeom>
-          <a:noFill/>
-          <a:ln>
-            <a:noFill/>
-          </a:ln>
-        </p:spPr>
-        <p:txBody>
-          <a:bodyPr anchorCtr="0" anchor="t" bIns="0" lIns="0" spcFirstLastPara="1" rIns="0" wrap="square" tIns="0">
-            <a:noAutofit/>
-          </a:bodyPr>
-          <a:lstStyle/>
-          <a:p>
-            <a:pPr indent="0" lvl="0" marL="0" marR="0" rtl="0" algn="l">
-              <a:lnSpc>
-                <a:spcPct val="130000"/>
-              </a:lnSpc>
-              <a:spcBef>
-                <a:spcPts val="0"/>
-              </a:spcBef>
-              <a:spcAft>
-                <a:spcPts val="0"/>
-              </a:spcAft>
-              <a:buNone/>
-            </a:pPr>
-            <a:r>
-              <a:rPr b="1" i="0" lang="en-US" sz="1150" u="none" cap="none" strike="noStrike">
-                <a:solidFill>
-                  <a:srgbClr val="2B2320"/>
-                </a:solidFill>
-                <a:latin typeface="Quattrocento Sans"/>
-                <a:ea typeface="Quattrocento Sans"/>
-                <a:cs typeface="Quattrocento Sans"/>
-                <a:sym typeface="Quattrocento Sans"/>
-              </a:rPr>
-              <a:t>Single-thread C++ CPU</a:t>
-            </a:r>
-            <a:endParaRPr b="0" i="0" sz="1150" u="none" cap="none" strike="noStrike"/>
-          </a:p>
-          <a:p>
-            <a:pPr indent="0" lvl="0" marL="0" marR="0" rtl="0" algn="l">
-              <a:lnSpc>
-                <a:spcPct val="130000"/>
-              </a:lnSpc>
-              <a:spcBef>
-                <a:spcPts val="0"/>
-              </a:spcBef>
-              <a:spcAft>
-                <a:spcPts val="0"/>
-              </a:spcAft>
-              <a:buNone/>
-            </a:pPr>
-            <a:r>
-              <a:rPr b="0" i="0" lang="en-US" sz="1150" u="none" cap="none" strike="noStrike">
-                <a:solidFill>
-                  <a:srgbClr val="2B2320"/>
-                </a:solidFill>
-                <a:latin typeface="Quattrocento Sans"/>
-                <a:ea typeface="Quattrocento Sans"/>
-                <a:cs typeface="Quattrocento Sans"/>
-                <a:sym typeface="Quattrocento Sans"/>
-              </a:rPr>
-              <a:t>AVX-512 fast path for AMD EPYC, generic fallback</a:t>
-            </a:r>
-            <a:endParaRPr b="0" i="0" sz="1150" u="none" cap="none" strike="noStrike"/>
-          </a:p>
-        </p:txBody>
-      </p:sp>
-      <p:sp>
-        <p:nvSpPr>
-          <p:cNvPr id="232" name="Google Shape;232;p9"/>
-          <p:cNvSpPr/>
-          <p:nvPr/>
-        </p:nvSpPr>
-        <p:spPr>
-          <a:xfrm>
-            <a:off x="6350000" y="4318000"/>
-            <a:ext cx="279400" cy="279400"/>
-          </a:xfrm>
-          <a:custGeom>
-            <a:rect b="b" l="l" r="r" t="t"/>
-            <a:pathLst>
-              <a:path extrusionOk="0" h="512" w="448">
-                <a:moveTo>
-                  <a:pt x="64" y="32"/>
-                </a:moveTo>
-                <a:cubicBezTo>
-                  <a:pt x="29" y="32"/>
-                  <a:pt x="0" y="61"/>
-                  <a:pt x="0" y="96"/>
-                </a:cubicBezTo>
-                <a:lnTo>
-                  <a:pt x="0" y="160"/>
-                </a:lnTo>
-                <a:cubicBezTo>
-                  <a:pt x="0" y="195"/>
-                  <a:pt x="29" y="224"/>
-                  <a:pt x="64" y="224"/>
-                </a:cubicBezTo>
-                <a:lnTo>
-                  <a:pt x="384" y="224"/>
-                </a:lnTo>
-                <a:cubicBezTo>
-                  <a:pt x="419" y="224"/>
-                  <a:pt x="448" y="195"/>
-                  <a:pt x="448" y="160"/>
-                </a:cubicBezTo>
-                <a:lnTo>
-                  <a:pt x="448" y="96"/>
-                </a:lnTo>
-                <a:cubicBezTo>
-                  <a:pt x="448" y="61"/>
-                  <a:pt x="419" y="32"/>
-                  <a:pt x="384" y="32"/>
-                </a:cubicBezTo>
-                <a:lnTo>
-                  <a:pt x="64" y="32"/>
-                </a:lnTo>
-                <a:close/>
-                <a:moveTo>
-                  <a:pt x="280" y="104"/>
-                </a:moveTo>
-                <a:cubicBezTo>
-                  <a:pt x="293" y="104"/>
-                  <a:pt x="304" y="115"/>
-                  <a:pt x="304" y="128"/>
-                </a:cubicBezTo>
-                <a:cubicBezTo>
-                  <a:pt x="304" y="141"/>
-                  <a:pt x="293" y="152"/>
-                  <a:pt x="280" y="152"/>
-                </a:cubicBezTo>
-                <a:cubicBezTo>
-                  <a:pt x="267" y="152"/>
-                  <a:pt x="256" y="141"/>
-                  <a:pt x="256" y="128"/>
-                </a:cubicBezTo>
-                <a:cubicBezTo>
-                  <a:pt x="256" y="115"/>
-                  <a:pt x="267" y="104"/>
-                  <a:pt x="280" y="104"/>
-                </a:cubicBezTo>
-                <a:close/>
-                <a:moveTo>
-                  <a:pt x="336" y="128"/>
-                </a:moveTo>
-                <a:cubicBezTo>
-                  <a:pt x="336" y="115"/>
-                  <a:pt x="347" y="104"/>
-                  <a:pt x="360" y="104"/>
-                </a:cubicBezTo>
-                <a:cubicBezTo>
-                  <a:pt x="373" y="104"/>
-                  <a:pt x="384" y="115"/>
-                  <a:pt x="384" y="128"/>
-                </a:cubicBezTo>
-                <a:cubicBezTo>
-                  <a:pt x="384" y="141"/>
-                  <a:pt x="373" y="152"/>
-                  <a:pt x="360" y="152"/>
-                </a:cubicBezTo>
-                <a:cubicBezTo>
-                  <a:pt x="347" y="152"/>
-                  <a:pt x="336" y="141"/>
-                  <a:pt x="336" y="128"/>
-                </a:cubicBezTo>
-                <a:close/>
-              </a:path>
-              <a:path extrusionOk="0" h="512" w="448">
-                <a:moveTo>
-                  <a:pt x="64" y="288"/>
-                </a:moveTo>
-                <a:cubicBezTo>
-                  <a:pt x="29" y="288"/>
-                  <a:pt x="0" y="317"/>
-                  <a:pt x="0" y="352"/>
-                </a:cubicBezTo>
-                <a:lnTo>
-                  <a:pt x="0" y="416"/>
-                </a:lnTo>
-                <a:cubicBezTo>
-                  <a:pt x="0" y="451"/>
-                  <a:pt x="29" y="480"/>
-                  <a:pt x="64" y="480"/>
-                </a:cubicBezTo>
-                <a:lnTo>
-                  <a:pt x="384" y="480"/>
-                </a:lnTo>
-                <a:cubicBezTo>
-                  <a:pt x="419" y="480"/>
-                  <a:pt x="448" y="451"/>
-                  <a:pt x="448" y="416"/>
-                </a:cubicBezTo>
-                <a:lnTo>
-                  <a:pt x="448" y="352"/>
-                </a:lnTo>
-                <a:cubicBezTo>
-                  <a:pt x="448" y="317"/>
-                  <a:pt x="419" y="288"/>
-                  <a:pt x="384" y="288"/>
-                </a:cubicBezTo>
-                <a:lnTo>
-                  <a:pt x="64" y="288"/>
-                </a:lnTo>
-                <a:close/>
-                <a:moveTo>
-                  <a:pt x="280" y="360"/>
-                </a:moveTo>
-                <a:cubicBezTo>
-                  <a:pt x="293" y="360"/>
-                  <a:pt x="304" y="371"/>
-                  <a:pt x="304" y="384"/>
-                </a:cubicBezTo>
-                <a:cubicBezTo>
-                  <a:pt x="304" y="397"/>
-                  <a:pt x="293" y="408"/>
-                  <a:pt x="280" y="408"/>
-                </a:cubicBezTo>
-                <a:cubicBezTo>
-                  <a:pt x="267" y="408"/>
-                  <a:pt x="256" y="397"/>
-                  <a:pt x="256" y="384"/>
-                </a:cubicBezTo>
-                <a:cubicBezTo>
-                  <a:pt x="256" y="371"/>
-                  <a:pt x="267" y="360"/>
-                  <a:pt x="280" y="360"/>
-                </a:cubicBezTo>
-                <a:close/>
-                <a:moveTo>
-                  <a:pt x="336" y="384"/>
-                </a:moveTo>
-                <a:cubicBezTo>
-                  <a:pt x="336" y="371"/>
-                  <a:pt x="347" y="360"/>
-                  <a:pt x="360" y="360"/>
-                </a:cubicBezTo>
-                <a:cubicBezTo>
-                  <a:pt x="373" y="360"/>
-                  <a:pt x="384" y="371"/>
-                  <a:pt x="384" y="384"/>
-                </a:cubicBezTo>
-                <a:cubicBezTo>
-                  <a:pt x="384" y="397"/>
-                  <a:pt x="373" y="408"/>
-                  <a:pt x="360" y="408"/>
-                </a:cubicBezTo>
-                <a:cubicBezTo>
-                  <a:pt x="347" y="408"/>
-                  <a:pt x="336" y="397"/>
-                  <a:pt x="336" y="384"/>
-                </a:cubicBezTo>
-                <a:close/>
-              </a:path>
-            </a:pathLst>
-          </a:custGeom>
-          <a:solidFill>
-            <a:srgbClr val="A87B2B"/>
-          </a:solidFill>
-          <a:ln>
-            <a:noFill/>
-          </a:ln>
-        </p:spPr>
-        <p:txBody>
-          <a:bodyPr anchorCtr="0" anchor="ctr" bIns="91425" lIns="91425" spcFirstLastPara="1" rIns="91425" wrap="square" tIns="91425">
-            <a:noAutofit/>
-          </a:bodyPr>
-          <a:lstStyle/>
-          <a:p>
-            <a:pPr indent="0" lvl="0" marL="0" rtl="0" algn="l">
-              <a:spcBef>
-                <a:spcPts val="0"/>
-              </a:spcBef>
-              <a:spcAft>
-                <a:spcPts val="0"/>
-              </a:spcAft>
-              <a:buNone/>
-            </a:pPr>
-            <a:r>
-              <a:t/>
-            </a:r>
-            <a:endParaRPr/>
-          </a:p>
-        </p:txBody>
-      </p:sp>
-      <p:sp>
-        <p:nvSpPr>
-          <p:cNvPr id="233" name="Google Shape;233;p9"/>
-          <p:cNvSpPr txBox="1"/>
-          <p:nvPr/>
-        </p:nvSpPr>
-        <p:spPr>
-          <a:xfrm>
-            <a:off x="6781800" y="4267200"/>
-            <a:ext cx="4800600" cy="558800"/>
-          </a:xfrm>
-          <a:prstGeom prst="rect">
-            <a:avLst/>
-          </a:prstGeom>
-          <a:noFill/>
-          <a:ln>
-            <a:noFill/>
-          </a:ln>
-        </p:spPr>
-        <p:txBody>
-          <a:bodyPr anchorCtr="0" anchor="t" bIns="0" lIns="0" spcFirstLastPara="1" rIns="0" wrap="square" tIns="0">
-            <a:noAutofit/>
-          </a:bodyPr>
-          <a:lstStyle/>
-          <a:p>
-            <a:pPr indent="0" lvl="0" marL="0" marR="0" rtl="0" algn="l">
-              <a:lnSpc>
-                <a:spcPct val="130000"/>
-              </a:lnSpc>
-              <a:spcBef>
-                <a:spcPts val="0"/>
-              </a:spcBef>
-              <a:spcAft>
-                <a:spcPts val="0"/>
-              </a:spcAft>
-              <a:buNone/>
-            </a:pPr>
-            <a:r>
-              <a:rPr b="1" i="0" lang="en-US" sz="1150" u="none" cap="none" strike="noStrike">
-                <a:solidFill>
-                  <a:srgbClr val="2B2320"/>
-                </a:solidFill>
-                <a:latin typeface="Quattrocento Sans"/>
-                <a:ea typeface="Quattrocento Sans"/>
-                <a:cs typeface="Quattrocento Sans"/>
-                <a:sym typeface="Quattrocento Sans"/>
-              </a:rPr>
-              <a:t>H100 GPU runtime with CUDA graphs</a:t>
-            </a:r>
-            <a:endParaRPr b="0" i="0" sz="1150" u="none" cap="none" strike="noStrike"/>
-          </a:p>
-          <a:p>
-            <a:pPr indent="0" lvl="0" marL="0" marR="0" rtl="0" algn="l">
-              <a:lnSpc>
-                <a:spcPct val="130000"/>
-              </a:lnSpc>
-              <a:spcBef>
-                <a:spcPts val="0"/>
-              </a:spcBef>
-              <a:spcAft>
-                <a:spcPts val="0"/>
-              </a:spcAft>
-              <a:buNone/>
-            </a:pPr>
-            <a:r>
-              <a:rPr b="0" i="0" lang="en-US" sz="1150" u="none" cap="none" strike="noStrike">
-                <a:solidFill>
-                  <a:srgbClr val="2B2320"/>
-                </a:solidFill>
-                <a:latin typeface="Quattrocento Sans"/>
-                <a:ea typeface="Quattrocento Sans"/>
-                <a:cs typeface="Quattrocento Sans"/>
-                <a:sym typeface="Quattrocento Sans"/>
-              </a:rPr>
-              <a:t>A recorded GPU job replayed with one call — one graph per QP</a:t>
-            </a:r>
-            <a:endParaRPr b="0" i="0" sz="1150" u="none" cap="none" strike="noStrike"/>
-          </a:p>
-        </p:txBody>
-      </p:sp>
-      <p:sp>
-        <p:nvSpPr>
-          <p:cNvPr id="234" name="Google Shape;234;p9"/>
-          <p:cNvSpPr/>
-          <p:nvPr/>
-        </p:nvSpPr>
-        <p:spPr>
-          <a:xfrm>
-            <a:off x="6350000" y="5029200"/>
-            <a:ext cx="279400" cy="279400"/>
-          </a:xfrm>
-          <a:custGeom>
-            <a:rect b="b" l="l" r="r" t="t"/>
-            <a:pathLst>
-              <a:path extrusionOk="0" h="512" w="384">
-                <a:moveTo>
-                  <a:pt x="16" y="64"/>
-                </a:moveTo>
-                <a:cubicBezTo>
-                  <a:pt x="16" y="29"/>
-                  <a:pt x="45" y="0"/>
-                  <a:pt x="80" y="0"/>
-                </a:cubicBezTo>
-                <a:lnTo>
-                  <a:pt x="304" y="0"/>
-                </a:lnTo>
-                <a:cubicBezTo>
-                  <a:pt x="339" y="0"/>
-                  <a:pt x="368" y="29"/>
-                  <a:pt x="368" y="64"/>
-                </a:cubicBezTo>
-                <a:lnTo>
-                  <a:pt x="368" y="448"/>
-                </a:lnTo>
-                <a:cubicBezTo>
-                  <a:pt x="368" y="483"/>
-                  <a:pt x="339" y="512"/>
-                  <a:pt x="304" y="512"/>
-                </a:cubicBezTo>
-                <a:lnTo>
-                  <a:pt x="80" y="512"/>
-                </a:lnTo>
-                <a:cubicBezTo>
-                  <a:pt x="45" y="512"/>
-                  <a:pt x="16" y="483"/>
-                  <a:pt x="16" y="448"/>
-                </a:cubicBezTo>
-                <a:lnTo>
-                  <a:pt x="16" y="64"/>
-                </a:lnTo>
-                <a:close/>
-                <a:moveTo>
-                  <a:pt x="128" y="440"/>
-                </a:moveTo>
-                <a:cubicBezTo>
-                  <a:pt x="128" y="453"/>
-                  <a:pt x="139" y="464"/>
-                  <a:pt x="152" y="464"/>
-                </a:cubicBezTo>
-                <a:lnTo>
-                  <a:pt x="232" y="464"/>
-                </a:lnTo>
-                <a:cubicBezTo>
-                  <a:pt x="245" y="464"/>
-                  <a:pt x="256" y="453"/>
-                  <a:pt x="256" y="440"/>
-                </a:cubicBezTo>
-                <a:cubicBezTo>
-                  <a:pt x="256" y="427"/>
-                  <a:pt x="245" y="416"/>
-                  <a:pt x="232" y="416"/>
-                </a:cubicBezTo>
-                <a:lnTo>
-                  <a:pt x="152" y="416"/>
-                </a:lnTo>
-                <a:cubicBezTo>
-                  <a:pt x="139" y="416"/>
-                  <a:pt x="128" y="427"/>
-                  <a:pt x="128" y="440"/>
-                </a:cubicBezTo>
-                <a:close/>
-                <a:moveTo>
-                  <a:pt x="304" y="64"/>
-                </a:moveTo>
-                <a:lnTo>
-                  <a:pt x="80" y="64"/>
-                </a:lnTo>
-                <a:lnTo>
-                  <a:pt x="80" y="368"/>
-                </a:lnTo>
-                <a:lnTo>
-                  <a:pt x="304" y="368"/>
-                </a:lnTo>
-                <a:lnTo>
-                  <a:pt x="304" y="64"/>
-                </a:lnTo>
-                <a:close/>
-              </a:path>
-            </a:pathLst>
-          </a:custGeom>
-          <a:solidFill>
-            <a:srgbClr val="A87B2B"/>
-          </a:solidFill>
-          <a:ln>
-            <a:noFill/>
-          </a:ln>
-        </p:spPr>
-        <p:txBody>
-          <a:bodyPr anchorCtr="0" anchor="ctr" bIns="91425" lIns="91425" spcFirstLastPara="1" rIns="91425" wrap="square" tIns="91425">
-            <a:noAutofit/>
-          </a:bodyPr>
-          <a:lstStyle/>
-          <a:p>
-            <a:pPr indent="0" lvl="0" marL="0" rtl="0" algn="l">
-              <a:spcBef>
-                <a:spcPts val="0"/>
-              </a:spcBef>
-              <a:spcAft>
-                <a:spcPts val="0"/>
-              </a:spcAft>
-              <a:buNone/>
-            </a:pPr>
-            <a:r>
-              <a:t/>
-            </a:r>
-            <a:endParaRPr/>
-          </a:p>
-        </p:txBody>
-      </p:sp>
-      <p:sp>
-        <p:nvSpPr>
-          <p:cNvPr id="235" name="Google Shape;235;p9"/>
-          <p:cNvSpPr txBox="1"/>
-          <p:nvPr/>
-        </p:nvSpPr>
-        <p:spPr>
-          <a:xfrm>
-            <a:off x="6781800" y="4978400"/>
-            <a:ext cx="4800600" cy="558800"/>
-          </a:xfrm>
-          <a:prstGeom prst="rect">
-            <a:avLst/>
-          </a:prstGeom>
-          <a:noFill/>
-          <a:ln>
-            <a:noFill/>
-          </a:ln>
-        </p:spPr>
-        <p:txBody>
-          <a:bodyPr anchorCtr="0" anchor="t" bIns="0" lIns="0" spcFirstLastPara="1" rIns="0" wrap="square" tIns="0">
-            <a:noAutofit/>
-          </a:bodyPr>
-          <a:lstStyle/>
-          <a:p>
-            <a:pPr indent="0" lvl="0" marL="0" marR="0" rtl="0" algn="l">
-              <a:lnSpc>
-                <a:spcPct val="130000"/>
-              </a:lnSpc>
-              <a:spcBef>
-                <a:spcPts val="0"/>
-              </a:spcBef>
-              <a:spcAft>
-                <a:spcPts val="0"/>
-              </a:spcAft>
-              <a:buNone/>
-            </a:pPr>
-            <a:r>
-              <a:rPr b="1" i="0" lang="en-US" sz="1150" u="none" cap="none" strike="noStrike">
-                <a:solidFill>
-                  <a:srgbClr val="2B2320"/>
-                </a:solidFill>
-                <a:latin typeface="Quattrocento Sans"/>
-                <a:ea typeface="Quattrocento Sans"/>
-                <a:cs typeface="Quattrocento Sans"/>
-                <a:sym typeface="Quattrocento Sans"/>
-              </a:rPr>
-              <a:t>Snapdragon path via ONNX export</a:t>
-            </a:r>
-            <a:endParaRPr b="0" i="0" sz="1150" u="none" cap="none" strike="noStrike"/>
-          </a:p>
-          <a:p>
-            <a:pPr indent="0" lvl="0" marL="0" marR="0" rtl="0" algn="l">
-              <a:lnSpc>
-                <a:spcPct val="130000"/>
-              </a:lnSpc>
-              <a:spcBef>
-                <a:spcPts val="0"/>
-              </a:spcBef>
-              <a:spcAft>
-                <a:spcPts val="0"/>
-              </a:spcAft>
-              <a:buNone/>
-            </a:pPr>
-            <a:r>
-              <a:rPr b="0" i="0" lang="en-US" sz="1150" u="none" cap="none" strike="noStrike">
-                <a:solidFill>
-                  <a:srgbClr val="2B2320"/>
-                </a:solidFill>
-                <a:latin typeface="Quattrocento Sans"/>
-                <a:ea typeface="Quattrocento Sans"/>
-                <a:cs typeface="Quattrocento Sans"/>
-                <a:sym typeface="Quattrocento Sans"/>
-              </a:rPr>
-              <a:t>encoder.onnx / decoder.onnx, fixed 1920×1088, QP as an input</a:t>
-            </a:r>
-            <a:endParaRPr b="0" i="0" sz="1150" u="none" cap="none" strike="noStrike"/>
-          </a:p>
-        </p:txBody>
-      </p:sp>
-      <p:sp>
-        <p:nvSpPr>
-          <p:cNvPr id="236" name="Google Shape;236;p9"/>
-          <p:cNvSpPr txBox="1"/>
-          <p:nvPr/>
-        </p:nvSpPr>
-        <p:spPr>
-          <a:xfrm>
-            <a:off x="6350000" y="5638800"/>
-            <a:ext cx="5232400" cy="431800"/>
-          </a:xfrm>
-          <a:prstGeom prst="rect">
-            <a:avLst/>
-          </a:prstGeom>
-          <a:noFill/>
-          <a:ln>
-            <a:noFill/>
-          </a:ln>
-        </p:spPr>
-        <p:txBody>
-          <a:bodyPr anchorCtr="0" anchor="t" bIns="0" lIns="0" spcFirstLastPara="1" rIns="0" wrap="square" tIns="0">
-            <a:noAutofit/>
-          </a:bodyPr>
-          <a:lstStyle/>
-          <a:p>
-            <a:pPr indent="0" lvl="0" marL="0" marR="0" rtl="0" algn="l">
-              <a:lnSpc>
-                <a:spcPct val="130000"/>
-              </a:lnSpc>
-              <a:spcBef>
-                <a:spcPts val="0"/>
-              </a:spcBef>
-              <a:spcAft>
-                <a:spcPts val="0"/>
-              </a:spcAft>
-              <a:buNone/>
-            </a:pPr>
-            <a:r>
-              <a:rPr b="1" i="0" lang="en-US" sz="1050" u="none" cap="none" strike="noStrike">
-                <a:solidFill>
-                  <a:srgbClr val="2B2320"/>
-                </a:solidFill>
-                <a:latin typeface="Quattrocento Sans"/>
-                <a:ea typeface="Quattrocento Sans"/>
-                <a:cs typeface="Quattrocento Sans"/>
-                <a:sym typeface="Quattrocento Sans"/>
-              </a:rPr>
-              <a:t>Benchmark harness included:</a:t>
-            </a:r>
-            <a:r>
-              <a:rPr b="0" i="0" lang="en-US" sz="1050" u="none" cap="none" strike="noStrike">
-                <a:solidFill>
-                  <a:srgbClr val="2B2320"/>
-                </a:solidFill>
-                <a:latin typeface="Quattrocento Sans"/>
-                <a:ea typeface="Quattrocento Sans"/>
-                <a:cs typeface="Quattrocento Sans"/>
-                <a:sym typeface="Quattrocento Sans"/>
-              </a:rPr>
-              <a:t> mean / median / p90 latency, stream SHA-256, determinism check.</a:t>
-            </a:r>
-            <a:endParaRPr b="0" i="0" sz="1050" u="none" cap="none" strike="noStrike"/>
-          </a:p>
-        </p:txBody>
-      </p:sp>
-      <p:sp>
-        <p:nvSpPr>
-          <p:cNvPr id="237" name="Google Shape;237;p9"/>
-          <p:cNvSpPr/>
-          <p:nvPr/>
-        </p:nvSpPr>
-        <p:spPr>
-          <a:xfrm>
-            <a:off x="609600" y="6451600"/>
-            <a:ext cx="10972800" cy="12700"/>
-          </a:xfrm>
-          <a:custGeom>
-            <a:rect b="b" l="l" r="r" t="t"/>
-            <a:pathLst>
-              <a:path extrusionOk="0" h="1" w="864">
-                <a:moveTo>
-                  <a:pt x="0" y="0"/>
-                </a:moveTo>
-                <a:lnTo>
-                  <a:pt x="864" y="0"/>
-                </a:lnTo>
-              </a:path>
-            </a:pathLst>
-          </a:custGeom>
-          <a:noFill/>
-          <a:ln cap="rnd" cmpd="sng" w="12700">
-            <a:solidFill>
-              <a:srgbClr val="DDD4C0"/>
-            </a:solidFill>
-            <a:prstDash val="solid"/>
-            <a:round/>
-            <a:headEnd len="sm" w="sm" type="none"/>
-            <a:tailEnd len="sm" w="sm" type="none"/>
-          </a:ln>
-        </p:spPr>
-      </p:sp>
-      <p:sp>
-        <p:nvSpPr>
-          <p:cNvPr id="238" name="Google Shape;238;p9"/>
-          <p:cNvSpPr txBox="1"/>
-          <p:nvPr/>
-        </p:nvSpPr>
-        <p:spPr>
-          <a:xfrm>
-            <a:off x="609600" y="6553200"/>
-            <a:ext cx="6350000" cy="177800"/>
-          </a:xfrm>
-          <a:prstGeom prst="rect">
-            <a:avLst/>
-          </a:prstGeom>
-          <a:noFill/>
-          <a:ln>
-            <a:noFill/>
-          </a:ln>
-        </p:spPr>
-        <p:txBody>
-          <a:bodyPr anchorCtr="0" anchor="t" bIns="0" lIns="0" spcFirstLastPara="1" rIns="0" wrap="square" tIns="0">
-            <a:noAutofit/>
-          </a:bodyPr>
-          <a:lstStyle/>
-          <a:p>
-            <a:pPr indent="0" lvl="0" marL="0" marR="0" rtl="0" algn="l">
-              <a:lnSpc>
-                <a:spcPct val="130000"/>
-              </a:lnSpc>
-              <a:spcBef>
-                <a:spcPts val="0"/>
-              </a:spcBef>
-              <a:spcAft>
-                <a:spcPts val="0"/>
-              </a:spcAft>
-              <a:buNone/>
-            </a:pPr>
-            <a:r>
-              <a:rPr b="0" i="0" lang="en-US" sz="1000" u="none" cap="none" strike="noStrike">
-                <a:solidFill>
-                  <a:srgbClr val="857C6C"/>
-                </a:solidFill>
-                <a:latin typeface="Quattrocento Sans"/>
-                <a:ea typeface="Quattrocento Sans"/>
-                <a:cs typeface="Quattrocento Sans"/>
-                <a:sym typeface="Quattrocento Sans"/>
-              </a:rPr>
               <a:t>CS6886 · IIT Madras — Source: github.com/microsoft/GenCodec (PULSE)</a:t>
             </a:r>
             <a:endParaRPr b="0" i="0" sz="1000" u="none" cap="none" strike="noStrike"/>
@@ -16956,7 +14491,7 @@
       </p:sp>
       <p:sp>
         <p:nvSpPr>
-          <p:cNvPr id="239" name="Google Shape;239;p9"/>
+          <p:cNvPr id="219" name="Google Shape;219;p9"/>
           <p:cNvSpPr txBox="1"/>
           <p:nvPr/>
         </p:nvSpPr>
@@ -17038,6 +14573,851 @@
               <a:cs typeface="JetBrains Mono"/>
               <a:sym typeface="JetBrains Mono"/>
             </a:endParaRPr>
+          </a:p>
+        </p:txBody>
+      </p:sp>
+      <p:sp>
+        <p:nvSpPr>
+          <p:cNvPr id="220" name="Google Shape;220;p9"/>
+          <p:cNvSpPr/>
+          <p:nvPr/>
+        </p:nvSpPr>
+        <p:spPr>
+          <a:xfrm flipH="1" rot="5400000">
+            <a:off x="4685625" y="4360250"/>
+            <a:ext cx="2916600" cy="22800"/>
+          </a:xfrm>
+          <a:prstGeom prst="rect">
+            <a:avLst/>
+          </a:prstGeom>
+          <a:solidFill>
+            <a:srgbClr val="D5A64E"/>
+          </a:solidFill>
+          <a:ln>
+            <a:noFill/>
+          </a:ln>
+        </p:spPr>
+        <p:txBody>
+          <a:bodyPr anchorCtr="0" anchor="ctr" bIns="91425" lIns="91425" spcFirstLastPara="1" rIns="91425" wrap="square" tIns="91425">
+            <a:noAutofit/>
+          </a:bodyPr>
+          <a:lstStyle/>
+          <a:p>
+            <a:pPr indent="0" lvl="0" marL="0" rtl="0" algn="l">
+              <a:spcBef>
+                <a:spcPts val="0"/>
+              </a:spcBef>
+              <a:spcAft>
+                <a:spcPts val="0"/>
+              </a:spcAft>
+              <a:buNone/>
+            </a:pPr>
+            <a:r>
+              <a:t/>
+            </a:r>
+            <a:endParaRPr sz="1600"/>
+          </a:p>
+        </p:txBody>
+      </p:sp>
+      <p:sp>
+        <p:nvSpPr>
+          <p:cNvPr id="221" name="Google Shape;221;p9"/>
+          <p:cNvSpPr txBox="1"/>
+          <p:nvPr/>
+        </p:nvSpPr>
+        <p:spPr>
+          <a:xfrm>
+            <a:off x="609600" y="2715875"/>
+            <a:ext cx="3113700" cy="451500"/>
+          </a:xfrm>
+          <a:prstGeom prst="rect">
+            <a:avLst/>
+          </a:prstGeom>
+          <a:noFill/>
+          <a:ln>
+            <a:noFill/>
+          </a:ln>
+        </p:spPr>
+        <p:txBody>
+          <a:bodyPr anchorCtr="0" anchor="t" bIns="91425" lIns="91425" spcFirstLastPara="1" rIns="91425" wrap="square" tIns="91425">
+            <a:spAutoFit/>
+          </a:bodyPr>
+          <a:lstStyle/>
+          <a:p>
+            <a:pPr indent="0" lvl="0" marL="0" rtl="0" algn="l">
+              <a:lnSpc>
+                <a:spcPct val="120000"/>
+              </a:lnSpc>
+              <a:spcBef>
+                <a:spcPts val="0"/>
+              </a:spcBef>
+              <a:spcAft>
+                <a:spcPts val="0"/>
+              </a:spcAft>
+              <a:buNone/>
+            </a:pPr>
+            <a:r>
+              <a:rPr b="1" lang="en-US" sz="1734">
+                <a:solidFill>
+                  <a:srgbClr val="781F18"/>
+                </a:solidFill>
+                <a:latin typeface="Quattrocento Sans"/>
+                <a:ea typeface="Quattrocento Sans"/>
+                <a:cs typeface="Quattrocento Sans"/>
+                <a:sym typeface="Quattrocento Sans"/>
+              </a:rPr>
+              <a:t>on clic_professional</a:t>
+            </a:r>
+            <a:endParaRPr sz="1734">
+              <a:solidFill>
+                <a:schemeClr val="dk1"/>
+              </a:solidFill>
+            </a:endParaRPr>
+          </a:p>
+        </p:txBody>
+      </p:sp>
+      <p:sp>
+        <p:nvSpPr>
+          <p:cNvPr id="222" name="Google Shape;222;p9"/>
+          <p:cNvSpPr txBox="1"/>
+          <p:nvPr/>
+        </p:nvSpPr>
+        <p:spPr>
+          <a:xfrm>
+            <a:off x="6239350" y="2758782"/>
+            <a:ext cx="2964300" cy="451500"/>
+          </a:xfrm>
+          <a:prstGeom prst="rect">
+            <a:avLst/>
+          </a:prstGeom>
+          <a:noFill/>
+          <a:ln>
+            <a:noFill/>
+          </a:ln>
+        </p:spPr>
+        <p:txBody>
+          <a:bodyPr anchorCtr="0" anchor="t" bIns="91425" lIns="91425" spcFirstLastPara="1" rIns="91425" wrap="square" tIns="91425">
+            <a:spAutoFit/>
+          </a:bodyPr>
+          <a:lstStyle/>
+          <a:p>
+            <a:pPr indent="0" lvl="0" marL="0" rtl="0" algn="l">
+              <a:lnSpc>
+                <a:spcPct val="120000"/>
+              </a:lnSpc>
+              <a:spcBef>
+                <a:spcPts val="0"/>
+              </a:spcBef>
+              <a:spcAft>
+                <a:spcPts val="0"/>
+              </a:spcAft>
+              <a:buNone/>
+            </a:pPr>
+            <a:r>
+              <a:rPr b="1" lang="en-US" sz="1734">
+                <a:solidFill>
+                  <a:srgbClr val="781F18"/>
+                </a:solidFill>
+                <a:latin typeface="Quattrocento Sans"/>
+                <a:ea typeface="Quattrocento Sans"/>
+                <a:cs typeface="Quattrocento Sans"/>
+                <a:sym typeface="Quattrocento Sans"/>
+              </a:rPr>
+              <a:t>kodak</a:t>
+            </a:r>
+            <a:endParaRPr sz="1734">
+              <a:solidFill>
+                <a:schemeClr val="dk1"/>
+              </a:solidFill>
+            </a:endParaRPr>
+          </a:p>
+        </p:txBody>
+      </p:sp>
+      <p:sp>
+        <p:nvSpPr>
+          <p:cNvPr id="223" name="Google Shape;223;p9"/>
+          <p:cNvSpPr txBox="1"/>
+          <p:nvPr/>
+        </p:nvSpPr>
+        <p:spPr>
+          <a:xfrm>
+            <a:off x="609600" y="3033623"/>
+            <a:ext cx="5487000" cy="412200"/>
+          </a:xfrm>
+          <a:prstGeom prst="rect">
+            <a:avLst/>
+          </a:prstGeom>
+          <a:noFill/>
+          <a:ln>
+            <a:noFill/>
+          </a:ln>
+        </p:spPr>
+        <p:txBody>
+          <a:bodyPr anchorCtr="0" anchor="t" bIns="91425" lIns="91425" spcFirstLastPara="1" rIns="91425" wrap="square" tIns="91425">
+            <a:spAutoFit/>
+          </a:bodyPr>
+          <a:lstStyle/>
+          <a:p>
+            <a:pPr indent="0" lvl="0" marL="0" rtl="0" algn="l">
+              <a:lnSpc>
+                <a:spcPct val="140000"/>
+              </a:lnSpc>
+              <a:spcBef>
+                <a:spcPts val="0"/>
+              </a:spcBef>
+              <a:spcAft>
+                <a:spcPts val="0"/>
+              </a:spcAft>
+              <a:buNone/>
+            </a:pPr>
+            <a:r>
+              <a:rPr lang="en-US" sz="1478" u="sng">
+                <a:solidFill>
+                  <a:schemeClr val="hlink"/>
+                </a:solidFill>
+                <a:latin typeface="Quattrocento Sans"/>
+                <a:ea typeface="Quattrocento Sans"/>
+                <a:cs typeface="Quattrocento Sans"/>
+                <a:sym typeface="Quattrocento Sans"/>
+                <a:hlinkClick r:id="rId3"/>
+              </a:rPr>
+              <a:t>https://data.vision.ee.ethz.ch/cvl/clic/professional_valid_2020.zip</a:t>
+            </a:r>
+            <a:endParaRPr sz="1478">
+              <a:solidFill>
+                <a:schemeClr val="dk1"/>
+              </a:solidFill>
+            </a:endParaRPr>
+          </a:p>
+        </p:txBody>
+      </p:sp>
+      <p:sp>
+        <p:nvSpPr>
+          <p:cNvPr id="224" name="Google Shape;224;p9"/>
+          <p:cNvSpPr txBox="1"/>
+          <p:nvPr/>
+        </p:nvSpPr>
+        <p:spPr>
+          <a:xfrm>
+            <a:off x="6239350" y="3038017"/>
+            <a:ext cx="5223900" cy="412200"/>
+          </a:xfrm>
+          <a:prstGeom prst="rect">
+            <a:avLst/>
+          </a:prstGeom>
+          <a:noFill/>
+          <a:ln>
+            <a:noFill/>
+          </a:ln>
+        </p:spPr>
+        <p:txBody>
+          <a:bodyPr anchorCtr="0" anchor="t" bIns="91425" lIns="91425" spcFirstLastPara="1" rIns="91425" wrap="square" tIns="91425">
+            <a:spAutoFit/>
+          </a:bodyPr>
+          <a:lstStyle/>
+          <a:p>
+            <a:pPr indent="0" lvl="0" marL="0" rtl="0" algn="l">
+              <a:lnSpc>
+                <a:spcPct val="140000"/>
+              </a:lnSpc>
+              <a:spcBef>
+                <a:spcPts val="0"/>
+              </a:spcBef>
+              <a:spcAft>
+                <a:spcPts val="0"/>
+              </a:spcAft>
+              <a:buNone/>
+            </a:pPr>
+            <a:r>
+              <a:rPr lang="en-US" sz="1478" u="sng">
+                <a:solidFill>
+                  <a:schemeClr val="hlink"/>
+                </a:solidFill>
+                <a:latin typeface="Quattrocento Sans"/>
+                <a:ea typeface="Quattrocento Sans"/>
+                <a:cs typeface="Quattrocento Sans"/>
+                <a:sym typeface="Quattrocento Sans"/>
+                <a:hlinkClick r:id="rId4"/>
+              </a:rPr>
+              <a:t>https://r0k.us/graphics/kodak/</a:t>
+            </a:r>
+            <a:endParaRPr sz="1478">
+              <a:solidFill>
+                <a:schemeClr val="dk1"/>
+              </a:solidFill>
+            </a:endParaRPr>
+          </a:p>
+        </p:txBody>
+      </p:sp>
+      <p:sp>
+        <p:nvSpPr>
+          <p:cNvPr id="225" name="Google Shape;225;p9"/>
+          <p:cNvSpPr txBox="1"/>
+          <p:nvPr/>
+        </p:nvSpPr>
+        <p:spPr>
+          <a:xfrm>
+            <a:off x="6370150" y="3332686"/>
+            <a:ext cx="4962300" cy="2455800"/>
+          </a:xfrm>
+          <a:prstGeom prst="rect">
+            <a:avLst/>
+          </a:prstGeom>
+          <a:noFill/>
+          <a:ln>
+            <a:noFill/>
+          </a:ln>
+        </p:spPr>
+        <p:txBody>
+          <a:bodyPr anchorCtr="0" anchor="t" bIns="91425" lIns="91425" spcFirstLastPara="1" rIns="91425" wrap="square" tIns="91425">
+            <a:spAutoFit/>
+          </a:bodyPr>
+          <a:lstStyle/>
+          <a:p>
+            <a:pPr indent="-311150" lvl="0" marL="457200" rtl="0" algn="l">
+              <a:lnSpc>
+                <a:spcPct val="115000"/>
+              </a:lnSpc>
+              <a:spcBef>
+                <a:spcPts val="1200"/>
+              </a:spcBef>
+              <a:spcAft>
+                <a:spcPts val="0"/>
+              </a:spcAft>
+              <a:buClr>
+                <a:schemeClr val="dk1"/>
+              </a:buClr>
+              <a:buSzPts val="1300"/>
+              <a:buChar char="●"/>
+            </a:pPr>
+            <a:r>
+              <a:rPr b="1" lang="en-US" sz="1300">
+                <a:solidFill>
+                  <a:schemeClr val="dk1"/>
+                </a:solidFill>
+              </a:rPr>
+              <a:t>Dataset:</a:t>
+            </a:r>
+            <a:r>
+              <a:rPr lang="en-US" sz="1300">
+                <a:solidFill>
+                  <a:schemeClr val="dk1"/>
+                </a:solidFill>
+              </a:rPr>
+              <a:t> 24 Kodak images evaluated at 8 QPs — 192 image evaluations.</a:t>
+            </a:r>
+            <a:endParaRPr sz="1300">
+              <a:solidFill>
+                <a:schemeClr val="dk1"/>
+              </a:solidFill>
+            </a:endParaRPr>
+          </a:p>
+          <a:p>
+            <a:pPr indent="-311150" lvl="0" marL="457200" rtl="0" algn="l">
+              <a:lnSpc>
+                <a:spcPct val="115000"/>
+              </a:lnSpc>
+              <a:spcBef>
+                <a:spcPts val="0"/>
+              </a:spcBef>
+              <a:spcAft>
+                <a:spcPts val="0"/>
+              </a:spcAft>
+              <a:buClr>
+                <a:schemeClr val="dk1"/>
+              </a:buClr>
+              <a:buSzPts val="1300"/>
+              <a:buChar char="●"/>
+            </a:pPr>
+            <a:r>
+              <a:rPr b="1" lang="en-US" sz="1300">
+                <a:solidFill>
+                  <a:schemeClr val="dk1"/>
+                </a:solidFill>
+              </a:rPr>
+              <a:t>Compression quality:</a:t>
+            </a:r>
+            <a:r>
+              <a:rPr lang="en-US" sz="1300">
+                <a:solidFill>
+                  <a:schemeClr val="dk1"/>
+                </a:solidFill>
+              </a:rPr>
+              <a:t> Average PSNR increases from 27.8 dB to 36.32 dB as BPP increases from 0.297 to 1.25</a:t>
+            </a:r>
+            <a:endParaRPr sz="1300">
+              <a:solidFill>
+                <a:schemeClr val="dk1"/>
+              </a:solidFill>
+            </a:endParaRPr>
+          </a:p>
+          <a:p>
+            <a:pPr indent="-311150" lvl="0" marL="457200" rtl="0" algn="l">
+              <a:lnSpc>
+                <a:spcPct val="115000"/>
+              </a:lnSpc>
+              <a:spcBef>
+                <a:spcPts val="0"/>
+              </a:spcBef>
+              <a:spcAft>
+                <a:spcPts val="0"/>
+              </a:spcAft>
+              <a:buClr>
+                <a:schemeClr val="dk1"/>
+              </a:buClr>
+              <a:buSzPts val="1300"/>
+              <a:buChar char="●"/>
+            </a:pPr>
+            <a:r>
+              <a:rPr b="1" lang="en-US" sz="1300">
+                <a:solidFill>
+                  <a:schemeClr val="dk1"/>
+                </a:solidFill>
+              </a:rPr>
+              <a:t>Runtime:</a:t>
+            </a:r>
+            <a:r>
+              <a:rPr lang="en-US" sz="1300">
+                <a:solidFill>
+                  <a:schemeClr val="dk1"/>
+                </a:solidFill>
+              </a:rPr>
+              <a:t> Encoding and decoding latency are recorded for each image and QP.</a:t>
+            </a:r>
+            <a:endParaRPr sz="1300">
+              <a:solidFill>
+                <a:schemeClr val="dk1"/>
+              </a:solidFill>
+            </a:endParaRPr>
+          </a:p>
+          <a:p>
+            <a:pPr indent="-311150" lvl="0" marL="457200" rtl="0" algn="l">
+              <a:lnSpc>
+                <a:spcPct val="115000"/>
+              </a:lnSpc>
+              <a:spcBef>
+                <a:spcPts val="0"/>
+              </a:spcBef>
+              <a:spcAft>
+                <a:spcPts val="0"/>
+              </a:spcAft>
+              <a:buClr>
+                <a:schemeClr val="dk1"/>
+              </a:buClr>
+              <a:buSzPts val="1300"/>
+              <a:buChar char="●"/>
+            </a:pPr>
+            <a:r>
+              <a:rPr b="1" lang="en-US" sz="1300">
+                <a:solidFill>
+                  <a:schemeClr val="dk1"/>
+                </a:solidFill>
+              </a:rPr>
+              <a:t>Energy:</a:t>
+            </a:r>
+            <a:r>
+              <a:rPr lang="en-US" sz="1300">
+                <a:solidFill>
+                  <a:schemeClr val="dk1"/>
+                </a:solidFill>
+              </a:rPr>
+              <a:t> Approximately 309.4 J for the complete evaluation run.</a:t>
+            </a:r>
+            <a:endParaRPr sz="1300">
+              <a:solidFill>
+                <a:schemeClr val="dk1"/>
+              </a:solidFill>
+            </a:endParaRPr>
+          </a:p>
+          <a:p>
+            <a:pPr indent="-311150" lvl="0" marL="457200" rtl="0" algn="l">
+              <a:lnSpc>
+                <a:spcPct val="115000"/>
+              </a:lnSpc>
+              <a:spcBef>
+                <a:spcPts val="0"/>
+              </a:spcBef>
+              <a:spcAft>
+                <a:spcPts val="0"/>
+              </a:spcAft>
+              <a:buClr>
+                <a:schemeClr val="dk1"/>
+              </a:buClr>
+              <a:buSzPts val="1300"/>
+              <a:buChar char="●"/>
+            </a:pPr>
+            <a:r>
+              <a:rPr b="1" lang="en-US" sz="1300">
+                <a:solidFill>
+                  <a:schemeClr val="dk1"/>
+                </a:solidFill>
+              </a:rPr>
+              <a:t>Memory:</a:t>
+            </a:r>
+            <a:r>
+              <a:rPr lang="en-US" sz="1300">
+                <a:solidFill>
+                  <a:schemeClr val="dk1"/>
+                </a:solidFill>
+              </a:rPr>
+              <a:t> Peak sampled GPU memory usage was 383 MiB; average sampled usage was 335.4 MiB.</a:t>
+            </a:r>
+            <a:endParaRPr sz="1300">
+              <a:solidFill>
+                <a:schemeClr val="dk1"/>
+              </a:solidFill>
+            </a:endParaRPr>
+          </a:p>
+        </p:txBody>
+      </p:sp>
+      <p:sp>
+        <p:nvSpPr>
+          <p:cNvPr id="226" name="Google Shape;226;p9"/>
+          <p:cNvSpPr txBox="1"/>
+          <p:nvPr/>
+        </p:nvSpPr>
+        <p:spPr>
+          <a:xfrm>
+            <a:off x="522050" y="1150125"/>
+            <a:ext cx="9191100" cy="369300"/>
+          </a:xfrm>
+          <a:prstGeom prst="rect">
+            <a:avLst/>
+          </a:prstGeom>
+          <a:noFill/>
+          <a:ln>
+            <a:noFill/>
+          </a:ln>
+        </p:spPr>
+        <p:txBody>
+          <a:bodyPr anchorCtr="0" anchor="t" bIns="91425" lIns="91425" spcFirstLastPara="1" rIns="91425" wrap="square" tIns="91425">
+            <a:spAutoFit/>
+          </a:bodyPr>
+          <a:lstStyle/>
+          <a:p>
+            <a:pPr indent="0" lvl="0" marL="0" rtl="0" algn="l">
+              <a:lnSpc>
+                <a:spcPct val="115000"/>
+              </a:lnSpc>
+              <a:spcBef>
+                <a:spcPts val="1200"/>
+              </a:spcBef>
+              <a:spcAft>
+                <a:spcPts val="1200"/>
+              </a:spcAft>
+              <a:buNone/>
+            </a:pPr>
+            <a:r>
+              <a:rPr b="1" lang="en-US" sz="1200">
+                <a:solidFill>
+                  <a:schemeClr val="dk1"/>
+                </a:solidFill>
+                <a:highlight>
+                  <a:srgbClr val="EF802B"/>
+                </a:highlight>
+              </a:rPr>
+              <a:t>Purpose</a:t>
+            </a:r>
+            <a:r>
+              <a:rPr b="1" lang="en-US" sz="1200">
+                <a:solidFill>
+                  <a:schemeClr val="dk1"/>
+                </a:solidFill>
+              </a:rPr>
+              <a:t>:</a:t>
+            </a:r>
+            <a:r>
+              <a:rPr lang="en-US" sz="1200">
+                <a:solidFill>
+                  <a:schemeClr val="dk1"/>
+                </a:solidFill>
+              </a:rPr>
+              <a:t> Establish a reference for comparing FP32 performance with quantized models.</a:t>
+            </a:r>
+            <a:endParaRPr sz="1500"/>
+          </a:p>
+        </p:txBody>
+      </p:sp>
+      <p:sp>
+        <p:nvSpPr>
+          <p:cNvPr id="227" name="Google Shape;227;p9"/>
+          <p:cNvSpPr txBox="1"/>
+          <p:nvPr/>
+        </p:nvSpPr>
+        <p:spPr>
+          <a:xfrm>
+            <a:off x="522050" y="1475700"/>
+            <a:ext cx="11031900" cy="1160700"/>
+          </a:xfrm>
+          <a:prstGeom prst="rect">
+            <a:avLst/>
+          </a:prstGeom>
+          <a:noFill/>
+          <a:ln>
+            <a:noFill/>
+          </a:ln>
+        </p:spPr>
+        <p:txBody>
+          <a:bodyPr anchorCtr="0" anchor="t" bIns="91425" lIns="91425" spcFirstLastPara="1" rIns="91425" wrap="square" tIns="91425">
+            <a:spAutoFit/>
+          </a:bodyPr>
+          <a:lstStyle/>
+          <a:p>
+            <a:pPr indent="0" lvl="0" marL="0" rtl="0" algn="l">
+              <a:lnSpc>
+                <a:spcPct val="115000"/>
+              </a:lnSpc>
+              <a:spcBef>
+                <a:spcPts val="1200"/>
+              </a:spcBef>
+              <a:spcAft>
+                <a:spcPts val="0"/>
+              </a:spcAft>
+              <a:buNone/>
+            </a:pPr>
+            <a:r>
+              <a:rPr b="1" lang="en-US" sz="1200" u="sng">
+                <a:solidFill>
+                  <a:schemeClr val="dk1"/>
+                </a:solidFill>
+              </a:rPr>
+              <a:t>Energy</a:t>
+            </a:r>
+            <a:r>
+              <a:rPr lang="en-US" sz="1200">
+                <a:solidFill>
+                  <a:schemeClr val="dk1"/>
+                </a:solidFill>
+              </a:rPr>
+              <a:t>: We sample GPU power (W) using </a:t>
+            </a:r>
+            <a:r>
+              <a:rPr lang="en-US" sz="1200">
+                <a:solidFill>
+                  <a:srgbClr val="188038"/>
+                </a:solidFill>
+                <a:latin typeface="Roboto Mono"/>
+                <a:ea typeface="Roboto Mono"/>
+                <a:cs typeface="Roboto Mono"/>
+                <a:sym typeface="Roboto Mono"/>
+              </a:rPr>
+              <a:t>nvidia-smi</a:t>
+            </a:r>
+            <a:r>
+              <a:rPr lang="en-US" sz="1200">
+                <a:solidFill>
+                  <a:schemeClr val="dk1"/>
+                </a:solidFill>
+              </a:rPr>
+              <a:t> every 200 ms and estimate total energy by trapezoidal integration: [time-power </a:t>
+            </a:r>
+            <a:r>
+              <a:rPr lang="en-US" sz="1200">
+                <a:solidFill>
+                  <a:schemeClr val="dk1"/>
+                </a:solidFill>
+              </a:rPr>
+              <a:t>product</a:t>
+            </a:r>
+            <a:r>
+              <a:rPr lang="en-US" sz="1200">
+                <a:solidFill>
+                  <a:schemeClr val="dk1"/>
+                </a:solidFill>
+              </a:rPr>
+              <a:t> summation over intervals], giving energy in joules (J).</a:t>
+            </a:r>
+            <a:endParaRPr sz="1200">
+              <a:solidFill>
+                <a:schemeClr val="dk1"/>
+              </a:solidFill>
+            </a:endParaRPr>
+          </a:p>
+          <a:p>
+            <a:pPr indent="0" lvl="0" marL="0" rtl="0" algn="l">
+              <a:lnSpc>
+                <a:spcPct val="115000"/>
+              </a:lnSpc>
+              <a:spcBef>
+                <a:spcPts val="1200"/>
+              </a:spcBef>
+              <a:spcAft>
+                <a:spcPts val="1200"/>
+              </a:spcAft>
+              <a:buNone/>
+            </a:pPr>
+            <a:r>
+              <a:rPr b="1" lang="en-US" sz="1200" u="sng">
+                <a:solidFill>
+                  <a:schemeClr val="dk1"/>
+                </a:solidFill>
+              </a:rPr>
+              <a:t>Memory</a:t>
+            </a:r>
+            <a:r>
+              <a:rPr lang="en-US" sz="1200">
+                <a:solidFill>
+                  <a:schemeClr val="dk1"/>
+                </a:solidFill>
+              </a:rPr>
+              <a:t>: We track total GPU memory usage (MiB) reported by </a:t>
+            </a:r>
+            <a:r>
+              <a:rPr lang="en-US" sz="1200">
+                <a:solidFill>
+                  <a:srgbClr val="188038"/>
+                </a:solidFill>
+                <a:latin typeface="Roboto Mono"/>
+                <a:ea typeface="Roboto Mono"/>
+                <a:cs typeface="Roboto Mono"/>
+                <a:sym typeface="Roboto Mono"/>
+              </a:rPr>
+              <a:t>nvidia-smi</a:t>
+            </a:r>
+            <a:r>
+              <a:rPr lang="en-US" sz="1200">
+                <a:solidFill>
+                  <a:schemeClr val="dk1"/>
+                </a:solidFill>
+              </a:rPr>
+              <a:t> throughout the run, recording the peak and average sampled usage; this is GPU-wide memory, not memory allocated exclusively to the model.</a:t>
+            </a:r>
+            <a:endParaRPr sz="1200">
+              <a:solidFill>
+                <a:schemeClr val="dk1"/>
+              </a:solidFill>
+            </a:endParaRPr>
+          </a:p>
+        </p:txBody>
+      </p:sp>
+      <p:sp>
+        <p:nvSpPr>
+          <p:cNvPr id="228" name="Google Shape;228;p9"/>
+          <p:cNvSpPr txBox="1"/>
+          <p:nvPr/>
+        </p:nvSpPr>
+        <p:spPr>
+          <a:xfrm>
+            <a:off x="609600" y="3390998"/>
+            <a:ext cx="5212200" cy="2185800"/>
+          </a:xfrm>
+          <a:prstGeom prst="rect">
+            <a:avLst/>
+          </a:prstGeom>
+          <a:noFill/>
+          <a:ln>
+            <a:noFill/>
+          </a:ln>
+        </p:spPr>
+        <p:txBody>
+          <a:bodyPr anchorCtr="0" anchor="t" bIns="91425" lIns="91425" spcFirstLastPara="1" rIns="91425" wrap="square" tIns="91425">
+            <a:spAutoFit/>
+          </a:bodyPr>
+          <a:lstStyle/>
+          <a:p>
+            <a:pPr indent="-311150" lvl="0" marL="457200" rtl="0" algn="l">
+              <a:spcBef>
+                <a:spcPts val="0"/>
+              </a:spcBef>
+              <a:spcAft>
+                <a:spcPts val="0"/>
+              </a:spcAft>
+              <a:buSzPts val="1300"/>
+              <a:buChar char="●"/>
+            </a:pPr>
+            <a:r>
+              <a:rPr b="1" lang="en-US" sz="1300"/>
+              <a:t>Dataset:</a:t>
+            </a:r>
+            <a:r>
+              <a:rPr lang="en-US" sz="1300"/>
+              <a:t> 41 CLIC Professional images evaluated at 8 QPs — 328 image evaluations.</a:t>
+            </a:r>
+            <a:endParaRPr sz="1300"/>
+          </a:p>
+          <a:p>
+            <a:pPr indent="-311150" lvl="0" marL="457200" rtl="0" algn="l">
+              <a:spcBef>
+                <a:spcPts val="0"/>
+              </a:spcBef>
+              <a:spcAft>
+                <a:spcPts val="0"/>
+              </a:spcAft>
+              <a:buSzPts val="1300"/>
+              <a:buChar char="●"/>
+            </a:pPr>
+            <a:r>
+              <a:rPr b="1" lang="en-US" sz="1300"/>
+              <a:t>Compression quality: </a:t>
+            </a:r>
+            <a:r>
+              <a:rPr lang="en-US" sz="1300"/>
+              <a:t>Average PSNR increases from 30.42 dB to 37.48 dB as BPP increases from 0.112 to 0.698.</a:t>
+            </a:r>
+            <a:endParaRPr sz="1300"/>
+          </a:p>
+          <a:p>
+            <a:pPr indent="-311150" lvl="0" marL="457200" rtl="0" algn="l">
+              <a:spcBef>
+                <a:spcPts val="0"/>
+              </a:spcBef>
+              <a:spcAft>
+                <a:spcPts val="0"/>
+              </a:spcAft>
+              <a:buSzPts val="1300"/>
+              <a:buChar char="●"/>
+            </a:pPr>
+            <a:r>
+              <a:rPr b="1" lang="en-US" sz="1300"/>
+              <a:t>Runtime: </a:t>
+            </a:r>
+            <a:r>
+              <a:rPr lang="en-US" sz="1300"/>
+              <a:t>Encoding and decoding latency are recorded for each image and QP.</a:t>
+            </a:r>
+            <a:endParaRPr sz="1300"/>
+          </a:p>
+          <a:p>
+            <a:pPr indent="-311150" lvl="0" marL="457200" rtl="0" algn="l">
+              <a:spcBef>
+                <a:spcPts val="0"/>
+              </a:spcBef>
+              <a:spcAft>
+                <a:spcPts val="0"/>
+              </a:spcAft>
+              <a:buSzPts val="1300"/>
+              <a:buChar char="●"/>
+            </a:pPr>
+            <a:r>
+              <a:rPr b="1" lang="en-US" sz="1300"/>
+              <a:t>Energy:</a:t>
+            </a:r>
+            <a:r>
+              <a:rPr lang="en-US" sz="1300"/>
+              <a:t> Approximately 5,159.7 J for the complete evaluation run, estimated from sampled GPU power.</a:t>
+            </a:r>
+            <a:endParaRPr sz="1300"/>
+          </a:p>
+          <a:p>
+            <a:pPr indent="-311150" lvl="0" marL="457200" rtl="0" algn="l">
+              <a:spcBef>
+                <a:spcPts val="0"/>
+              </a:spcBef>
+              <a:spcAft>
+                <a:spcPts val="0"/>
+              </a:spcAft>
+              <a:buSzPts val="1300"/>
+              <a:buChar char="●"/>
+            </a:pPr>
+            <a:r>
+              <a:rPr b="1" lang="en-US" sz="1300"/>
+              <a:t>Memory: </a:t>
+            </a:r>
+            <a:r>
+              <a:rPr lang="en-US" sz="1300"/>
+              <a:t>Peak sampled GPU memory usage was 1,554 MiB; average sampled usage was 1,424.7 MiB.</a:t>
+            </a:r>
+            <a:endParaRPr sz="1300"/>
           </a:p>
         </p:txBody>
       </p:sp>
@@ -17061,7 +15441,7 @@
     </p:bg>
     <p:spTree>
       <p:nvGrpSpPr>
-        <p:cNvPr id="243" name="Shape 243"/>
+        <p:cNvPr id="232" name="Shape 232"/>
         <p:cNvGrpSpPr/>
         <p:nvPr/>
       </p:nvGrpSpPr>
@@ -17075,7 +15455,7 @@
       </p:grpSpPr>
       <p:sp>
         <p:nvSpPr>
-          <p:cNvPr id="244" name="Google Shape;244;p10"/>
+          <p:cNvPr id="233" name="Google Shape;233;p10"/>
           <p:cNvSpPr txBox="1"/>
           <p:nvPr/>
         </p:nvSpPr>
@@ -17128,7 +15508,7 @@
       </p:sp>
       <p:sp>
         <p:nvSpPr>
-          <p:cNvPr id="245" name="Google Shape;245;p10"/>
+          <p:cNvPr id="234" name="Google Shape;234;p10"/>
           <p:cNvSpPr txBox="1"/>
           <p:nvPr/>
         </p:nvSpPr>
@@ -17173,7 +15553,19 @@
                 <a:cs typeface="Unna"/>
                 <a:sym typeface="Unna"/>
               </a:rPr>
-              <a:t>References and credits</a:t>
+              <a:t>Pulse</a:t>
+            </a:r>
+            <a:r>
+              <a:rPr b="1" lang="en-US" sz="2600">
+                <a:solidFill>
+                  <a:srgbClr val="2B2320"/>
+                </a:solidFill>
+                <a:latin typeface="Unna"/>
+                <a:ea typeface="Unna"/>
+                <a:cs typeface="Unna"/>
+                <a:sym typeface="Unna"/>
+              </a:rPr>
+              <a:t>-MSE: References &amp; Resources</a:t>
             </a:r>
             <a:endParaRPr b="0" i="0" sz="2600" u="none" cap="none" strike="noStrike"/>
           </a:p>
@@ -17181,7 +15573,7 @@
       </p:sp>
       <p:sp>
         <p:nvSpPr>
-          <p:cNvPr id="246" name="Google Shape;246;p10"/>
+          <p:cNvPr id="235" name="Google Shape;235;p10"/>
           <p:cNvSpPr/>
           <p:nvPr/>
         </p:nvSpPr>
@@ -17224,7 +15616,7 @@
       </p:sp>
       <p:sp>
         <p:nvSpPr>
-          <p:cNvPr id="247" name="Google Shape;247;p10"/>
+          <p:cNvPr id="236" name="Google Shape;236;p10"/>
           <p:cNvSpPr txBox="1"/>
           <p:nvPr/>
         </p:nvSpPr>
@@ -17260,16 +15652,7 @@
               <a:buNone/>
             </a:pPr>
             <a:r>
-              <a:rPr b="1" i="0" lang="en-US" sz="2100" u="none" cap="none" strike="noStrike">
-                <a:solidFill>
-                  <a:srgbClr val="781F18"/>
-                </a:solidFill>
-                <a:latin typeface="Quattrocento Sans"/>
-                <a:ea typeface="Quattrocento Sans"/>
-                <a:cs typeface="Quattrocento Sans"/>
-                <a:sym typeface="Quattrocento Sans"/>
-              </a:rPr>
-              <a:t>REFERENCES</a:t>
+              <a:t/>
             </a:r>
             <a:endParaRPr b="0" i="0" sz="2100" u="none" cap="none" strike="noStrike"/>
           </a:p>
@@ -17277,455 +15660,7 @@
       </p:sp>
       <p:sp>
         <p:nvSpPr>
-          <p:cNvPr id="248" name="Google Shape;248;p10"/>
-          <p:cNvSpPr txBox="1"/>
-          <p:nvPr/>
-        </p:nvSpPr>
-        <p:spPr>
-          <a:xfrm>
-            <a:off x="609600" y="1864825"/>
-            <a:ext cx="11034600" cy="2832000"/>
-          </a:xfrm>
-          <a:prstGeom prst="rect">
-            <a:avLst/>
-          </a:prstGeom>
-          <a:noFill/>
-          <a:ln>
-            <a:noFill/>
-          </a:ln>
-        </p:spPr>
-        <p:txBody>
-          <a:bodyPr anchorCtr="0" anchor="t" bIns="0" lIns="0" spcFirstLastPara="1" rIns="0" wrap="square" tIns="0">
-            <a:noAutofit/>
-          </a:bodyPr>
-          <a:lstStyle/>
-          <a:p>
-            <a:pPr indent="0" lvl="0" marL="0" marR="0" rtl="0" algn="l">
-              <a:lnSpc>
-                <a:spcPct val="140000"/>
-              </a:lnSpc>
-              <a:spcBef>
-                <a:spcPts val="0"/>
-              </a:spcBef>
-              <a:spcAft>
-                <a:spcPts val="0"/>
-              </a:spcAft>
-              <a:buNone/>
-            </a:pPr>
-            <a:r>
-              <a:rPr b="1" i="0" lang="en-US" sz="1600" u="none" cap="none" strike="noStrike">
-                <a:solidFill>
-                  <a:srgbClr val="2B2320"/>
-                </a:solidFill>
-                <a:latin typeface="Quattrocento Sans"/>
-                <a:ea typeface="Quattrocento Sans"/>
-                <a:cs typeface="Quattrocento Sans"/>
-                <a:sym typeface="Quattrocento Sans"/>
-              </a:rPr>
-              <a:t>[1]</a:t>
-            </a:r>
-            <a:r>
-              <a:rPr b="0" i="0" lang="en-US" sz="1600" u="none" cap="none" strike="noStrike">
-                <a:solidFill>
-                  <a:srgbClr val="2B2320"/>
-                </a:solidFill>
-                <a:latin typeface="Quattrocento Sans"/>
-                <a:ea typeface="Quattrocento Sans"/>
-                <a:cs typeface="Quattrocento Sans"/>
-                <a:sym typeface="Quattrocento Sans"/>
-              </a:rPr>
-              <a:t> Jia, Zhang, Zheng, Xie, Li, Li, Li, Lu. </a:t>
-            </a:r>
-            <a:r>
-              <a:rPr b="0" i="1" lang="en-US" sz="1600" u="none" cap="none" strike="noStrike">
-                <a:solidFill>
-                  <a:srgbClr val="2B2320"/>
-                </a:solidFill>
-                <a:latin typeface="Quattrocento Sans"/>
-                <a:ea typeface="Quattrocento Sans"/>
-                <a:cs typeface="Quattrocento Sans"/>
-                <a:sym typeface="Quattrocento Sans"/>
-              </a:rPr>
-              <a:t>PULSE: Unlocking Practical Image Compression on Single-Thread CPU.</a:t>
-            </a:r>
-            <a:r>
-              <a:rPr b="0" i="0" lang="en-US" sz="1600" u="none" cap="none" strike="noStrike">
-                <a:solidFill>
-                  <a:srgbClr val="2B2320"/>
-                </a:solidFill>
-                <a:latin typeface="Quattrocento Sans"/>
-                <a:ea typeface="Quattrocento Sans"/>
-                <a:cs typeface="Quattrocento Sans"/>
-                <a:sym typeface="Quattrocento Sans"/>
-              </a:rPr>
-              <a:t> </a:t>
-            </a:r>
-            <a:r>
-              <a:rPr b="0" i="0" lang="en-US" sz="1600" u="sng" cap="none" strike="noStrike">
-                <a:solidFill>
-                  <a:schemeClr val="hlink"/>
-                </a:solidFill>
-                <a:latin typeface="Quattrocento Sans"/>
-                <a:ea typeface="Quattrocento Sans"/>
-                <a:cs typeface="Quattrocento Sans"/>
-                <a:sym typeface="Quattrocento Sans"/>
-                <a:hlinkClick r:id="rId3"/>
-              </a:rPr>
-              <a:t>arXiv:2609.18602</a:t>
-            </a:r>
-            <a:r>
-              <a:rPr b="0" i="0" lang="en-US" sz="1600" u="none" cap="none" strike="noStrike">
-                <a:solidFill>
-                  <a:srgbClr val="2B2320"/>
-                </a:solidFill>
-                <a:latin typeface="Quattrocento Sans"/>
-                <a:ea typeface="Quattrocento Sans"/>
-                <a:cs typeface="Quattrocento Sans"/>
-                <a:sym typeface="Quattrocento Sans"/>
-              </a:rPr>
-              <a:t> (preprint) · </a:t>
-            </a:r>
-            <a:r>
-              <a:rPr b="0" i="0" lang="en-US" sz="1600" u="sng" cap="none" strike="noStrike">
-                <a:solidFill>
-                  <a:schemeClr val="hlink"/>
-                </a:solidFill>
-                <a:latin typeface="Quattrocento Sans"/>
-                <a:ea typeface="Quattrocento Sans"/>
-                <a:cs typeface="Quattrocento Sans"/>
-                <a:sym typeface="Quattrocento Sans"/>
-                <a:hlinkClick r:id="rId4"/>
-              </a:rPr>
-              <a:t>github.com/microsoft/GenCodec</a:t>
-            </a:r>
-            <a:r>
-              <a:rPr b="0" i="0" lang="en-US" sz="1600" u="none" cap="none" strike="noStrike">
-                <a:solidFill>
-                  <a:srgbClr val="2B2320"/>
-                </a:solidFill>
-                <a:latin typeface="Quattrocento Sans"/>
-                <a:ea typeface="Quattrocento Sans"/>
-                <a:cs typeface="Quattrocento Sans"/>
-                <a:sym typeface="Quattrocento Sans"/>
-              </a:rPr>
-              <a:t> · </a:t>
-            </a:r>
-            <a:r>
-              <a:rPr b="0" i="0" lang="en-US" sz="1600" u="sng" cap="none" strike="noStrike">
-                <a:solidFill>
-                  <a:schemeClr val="hlink"/>
-                </a:solidFill>
-                <a:latin typeface="Quattrocento Sans"/>
-                <a:ea typeface="Quattrocento Sans"/>
-                <a:cs typeface="Quattrocento Sans"/>
-                <a:sym typeface="Quattrocento Sans"/>
-                <a:hlinkClick r:id="rId5"/>
-              </a:rPr>
-              <a:t>HF zhaoyangjia/PULSE</a:t>
-            </a:r>
-            <a:endParaRPr b="0" i="0" sz="1600" u="none" cap="none" strike="noStrike"/>
-          </a:p>
-          <a:p>
-            <a:pPr indent="0" lvl="0" marL="0" marR="0" rtl="0" algn="l">
-              <a:lnSpc>
-                <a:spcPct val="140000"/>
-              </a:lnSpc>
-              <a:spcBef>
-                <a:spcPts val="600"/>
-              </a:spcBef>
-              <a:spcAft>
-                <a:spcPts val="0"/>
-              </a:spcAft>
-              <a:buNone/>
-            </a:pPr>
-            <a:r>
-              <a:rPr b="1" i="0" lang="en-US" sz="1600" u="none" cap="none" strike="noStrike">
-                <a:solidFill>
-                  <a:srgbClr val="2B2320"/>
-                </a:solidFill>
-                <a:latin typeface="Quattrocento Sans"/>
-                <a:ea typeface="Quattrocento Sans"/>
-                <a:cs typeface="Quattrocento Sans"/>
-                <a:sym typeface="Quattrocento Sans"/>
-              </a:rPr>
-              <a:t>[2]</a:t>
-            </a:r>
-            <a:r>
-              <a:rPr b="0" i="0" lang="en-US" sz="1600" u="none" cap="none" strike="noStrike">
-                <a:solidFill>
-                  <a:srgbClr val="2B2320"/>
-                </a:solidFill>
-                <a:latin typeface="Quattrocento Sans"/>
-                <a:ea typeface="Quattrocento Sans"/>
-                <a:cs typeface="Quattrocento Sans"/>
-                <a:sym typeface="Quattrocento Sans"/>
-              </a:rPr>
-              <a:t> Dong et al., HAWQ / V2 / V3 — ICCV 2019, NeurIPS 2020, ICML 2021 · VENOM, SC 2023 (course readings)</a:t>
-            </a:r>
-            <a:endParaRPr b="0" i="0" sz="1600" u="none" cap="none" strike="noStrike"/>
-          </a:p>
-          <a:p>
-            <a:pPr indent="0" lvl="0" marL="0" marR="0" rtl="0" algn="l">
-              <a:lnSpc>
-                <a:spcPct val="140000"/>
-              </a:lnSpc>
-              <a:spcBef>
-                <a:spcPts val="600"/>
-              </a:spcBef>
-              <a:spcAft>
-                <a:spcPts val="0"/>
-              </a:spcAft>
-              <a:buNone/>
-            </a:pPr>
-            <a:r>
-              <a:rPr b="1" i="0" lang="en-US" sz="1600" u="none" cap="none" strike="noStrike">
-                <a:solidFill>
-                  <a:srgbClr val="2B2320"/>
-                </a:solidFill>
-                <a:latin typeface="Quattrocento Sans"/>
-                <a:ea typeface="Quattrocento Sans"/>
-                <a:cs typeface="Quattrocento Sans"/>
-                <a:sym typeface="Quattrocento Sans"/>
-              </a:rPr>
-              <a:t>[3]</a:t>
-            </a:r>
-            <a:r>
-              <a:rPr b="0" i="0" lang="en-US" sz="1600" u="none" cap="none" strike="noStrike">
-                <a:solidFill>
-                  <a:srgbClr val="2B2320"/>
-                </a:solidFill>
-                <a:latin typeface="Quattrocento Sans"/>
-                <a:ea typeface="Quattrocento Sans"/>
-                <a:cs typeface="Quattrocento Sans"/>
-                <a:sym typeface="Quattrocento Sans"/>
-              </a:rPr>
-              <a:t> Kamisli, Racapé, Choi. DCC 2024, </a:t>
-            </a:r>
-            <a:r>
-              <a:rPr b="0" i="0" lang="en-US" sz="1600" u="sng" cap="none" strike="noStrike">
-                <a:solidFill>
-                  <a:schemeClr val="hlink"/>
-                </a:solidFill>
-                <a:latin typeface="Quattrocento Sans"/>
-                <a:ea typeface="Quattrocento Sans"/>
-                <a:cs typeface="Quattrocento Sans"/>
-                <a:sym typeface="Quattrocento Sans"/>
-                <a:hlinkClick r:id="rId6"/>
-              </a:rPr>
-              <a:t>arXiv:2402.18930</a:t>
-            </a:r>
-            <a:r>
-              <a:rPr b="0" i="0" lang="en-US" sz="1600" u="none" cap="none" strike="noStrike">
-                <a:solidFill>
-                  <a:srgbClr val="2B2320"/>
-                </a:solidFill>
-                <a:latin typeface="Quattrocento Sans"/>
-                <a:ea typeface="Quattrocento Sans"/>
-                <a:cs typeface="Quattrocento Sans"/>
-                <a:sym typeface="Quattrocento Sans"/>
-              </a:rPr>
-              <a:t> (fallback codec)</a:t>
-            </a:r>
-            <a:endParaRPr b="0" i="0" sz="1600" u="none" cap="none" strike="noStrike"/>
-          </a:p>
-          <a:p>
-            <a:pPr indent="0" lvl="0" marL="0" marR="0" rtl="0" algn="l">
-              <a:lnSpc>
-                <a:spcPct val="140000"/>
-              </a:lnSpc>
-              <a:spcBef>
-                <a:spcPts val="600"/>
-              </a:spcBef>
-              <a:spcAft>
-                <a:spcPts val="0"/>
-              </a:spcAft>
-              <a:buNone/>
-            </a:pPr>
-            <a:r>
-              <a:rPr b="1" i="0" lang="en-US" sz="1600" u="none" cap="none" strike="noStrike">
-                <a:solidFill>
-                  <a:srgbClr val="2B2320"/>
-                </a:solidFill>
-                <a:latin typeface="Quattrocento Sans"/>
-                <a:ea typeface="Quattrocento Sans"/>
-                <a:cs typeface="Quattrocento Sans"/>
-                <a:sym typeface="Quattrocento Sans"/>
-              </a:rPr>
-              <a:t>[4]</a:t>
-            </a:r>
-            <a:r>
-              <a:rPr b="0" i="0" lang="en-US" sz="1600" u="none" cap="none" strike="noStrike">
-                <a:solidFill>
-                  <a:srgbClr val="2B2320"/>
-                </a:solidFill>
-                <a:latin typeface="Quattrocento Sans"/>
-                <a:ea typeface="Quattrocento Sans"/>
-                <a:cs typeface="Quattrocento Sans"/>
-                <a:sym typeface="Quattrocento Sans"/>
-              </a:rPr>
-              <a:t> Related 8-bit codec work: Ye et al., JVCIR 2025 · HaTQ, </a:t>
-            </a:r>
-            <a:r>
-              <a:rPr b="0" i="0" lang="en-US" sz="1600" u="sng" cap="none" strike="noStrike">
-                <a:solidFill>
-                  <a:schemeClr val="hlink"/>
-                </a:solidFill>
-                <a:latin typeface="Quattrocento Sans"/>
-                <a:ea typeface="Quattrocento Sans"/>
-                <a:cs typeface="Quattrocento Sans"/>
-                <a:sym typeface="Quattrocento Sans"/>
-                <a:hlinkClick r:id="rId7"/>
-              </a:rPr>
-              <a:t>arXiv:2608.01653</a:t>
-            </a:r>
-            <a:r>
-              <a:rPr b="0" i="0" lang="en-US" sz="1600" u="none" cap="none" strike="noStrike">
-                <a:solidFill>
-                  <a:srgbClr val="2B2320"/>
-                </a:solidFill>
-                <a:latin typeface="Quattrocento Sans"/>
-                <a:ea typeface="Quattrocento Sans"/>
-                <a:cs typeface="Quattrocento Sans"/>
-                <a:sym typeface="Quattrocento Sans"/>
-              </a:rPr>
-              <a:t> · SenseTime, </a:t>
-            </a:r>
-            <a:r>
-              <a:rPr b="0" i="0" lang="en-US" sz="1600" u="sng" cap="none" strike="noStrike">
-                <a:solidFill>
-                  <a:schemeClr val="hlink"/>
-                </a:solidFill>
-                <a:latin typeface="Quattrocento Sans"/>
-                <a:ea typeface="Quattrocento Sans"/>
-                <a:cs typeface="Quattrocento Sans"/>
-                <a:sym typeface="Quattrocento Sans"/>
-                <a:hlinkClick r:id="rId8"/>
-              </a:rPr>
-              <a:t>arXiv:2207.14524</a:t>
-            </a:r>
-            <a:endParaRPr b="0" i="0" sz="1600" u="none" cap="none" strike="noStrike"/>
-          </a:p>
-          <a:p>
-            <a:pPr indent="0" lvl="0" marL="0" marR="0" rtl="0" algn="l">
-              <a:lnSpc>
-                <a:spcPct val="140000"/>
-              </a:lnSpc>
-              <a:spcBef>
-                <a:spcPts val="600"/>
-              </a:spcBef>
-              <a:spcAft>
-                <a:spcPts val="0"/>
-              </a:spcAft>
-              <a:buNone/>
-            </a:pPr>
-            <a:r>
-              <a:rPr b="1" i="0" lang="en-US" sz="1600" u="none" cap="none" strike="noStrike">
-                <a:solidFill>
-                  <a:srgbClr val="2B2320"/>
-                </a:solidFill>
-                <a:latin typeface="Quattrocento Sans"/>
-                <a:ea typeface="Quattrocento Sans"/>
-                <a:cs typeface="Quattrocento Sans"/>
-                <a:sym typeface="Quattrocento Sans"/>
-              </a:rPr>
-              <a:t>[5]</a:t>
-            </a:r>
-            <a:r>
-              <a:rPr b="0" i="0" lang="en-US" sz="1600" u="none" cap="none" strike="noStrike">
-                <a:solidFill>
-                  <a:srgbClr val="2B2320"/>
-                </a:solidFill>
-                <a:latin typeface="Quattrocento Sans"/>
-                <a:ea typeface="Quattrocento Sans"/>
-                <a:cs typeface="Quattrocento Sans"/>
-                <a:sym typeface="Quattrocento Sans"/>
-              </a:rPr>
-              <a:t> Tools: PyTorch · ONNX · TensorRT · NVML | Data: Kodak · CLIC 2020 · DIV2K</a:t>
-            </a:r>
-            <a:endParaRPr b="0" i="0" sz="1600" u="none" cap="none" strike="noStrike"/>
-          </a:p>
-        </p:txBody>
-      </p:sp>
-      <p:sp>
-        <p:nvSpPr>
-          <p:cNvPr id="249" name="Google Shape;249;p10"/>
-          <p:cNvSpPr txBox="1"/>
-          <p:nvPr/>
-        </p:nvSpPr>
-        <p:spPr>
-          <a:xfrm>
-            <a:off x="3222750" y="5012250"/>
-            <a:ext cx="5808300" cy="571500"/>
-          </a:xfrm>
-          <a:prstGeom prst="rect">
-            <a:avLst/>
-          </a:prstGeom>
-          <a:noFill/>
-          <a:ln>
-            <a:noFill/>
-          </a:ln>
-        </p:spPr>
-        <p:txBody>
-          <a:bodyPr anchorCtr="0" anchor="ctr" bIns="0" lIns="0" spcFirstLastPara="1" rIns="0" wrap="square" tIns="0">
-            <a:noAutofit/>
-          </a:bodyPr>
-          <a:lstStyle/>
-          <a:p>
-            <a:pPr indent="0" lvl="0" marL="0" marR="0" rtl="0" algn="l">
-              <a:lnSpc>
-                <a:spcPct val="120000"/>
-              </a:lnSpc>
-              <a:spcBef>
-                <a:spcPts val="0"/>
-              </a:spcBef>
-              <a:spcAft>
-                <a:spcPts val="0"/>
-              </a:spcAft>
-              <a:buNone/>
-            </a:pPr>
-            <a:r>
-              <a:rPr b="0" i="0" lang="en-US" sz="2000" u="none" cap="none" strike="noStrike">
-                <a:solidFill>
-                  <a:srgbClr val="857C6C"/>
-                </a:solidFill>
-                <a:latin typeface="Quattrocento Sans"/>
-                <a:ea typeface="Quattrocento Sans"/>
-                <a:cs typeface="Quattrocento Sans"/>
-                <a:sym typeface="Quattrocento Sans"/>
-              </a:rPr>
-              <a:t>Questions welcome — [</a:t>
-            </a:r>
-            <a:r>
-              <a:rPr b="1" lang="en-US" sz="2000">
-                <a:solidFill>
-                  <a:srgbClr val="857C6C"/>
-                </a:solidFill>
-                <a:latin typeface="Quattrocento Sans"/>
-                <a:ea typeface="Quattrocento Sans"/>
-                <a:cs typeface="Quattrocento Sans"/>
-                <a:sym typeface="Quattrocento Sans"/>
-              </a:rPr>
-              <a:t>cs23b010@smail.iitm.ac.in</a:t>
-            </a:r>
-            <a:r>
-              <a:rPr b="0" i="0" lang="en-US" sz="2000" u="none" cap="none" strike="noStrike">
-                <a:solidFill>
-                  <a:srgbClr val="857C6C"/>
-                </a:solidFill>
-                <a:latin typeface="Quattrocento Sans"/>
-                <a:ea typeface="Quattrocento Sans"/>
-                <a:cs typeface="Quattrocento Sans"/>
-                <a:sym typeface="Quattrocento Sans"/>
-              </a:rPr>
-              <a:t>]</a:t>
-            </a:r>
-            <a:endParaRPr b="0" i="0" sz="2000" u="none" cap="none" strike="noStrike"/>
-          </a:p>
-        </p:txBody>
-      </p:sp>
-      <p:sp>
-        <p:nvSpPr>
-          <p:cNvPr id="250" name="Google Shape;250;p10"/>
+          <p:cNvPr id="237" name="Google Shape;237;p10"/>
           <p:cNvSpPr/>
           <p:nvPr/>
         </p:nvSpPr>
@@ -17761,7 +15696,7 @@
       </p:sp>
       <p:sp>
         <p:nvSpPr>
-          <p:cNvPr id="251" name="Google Shape;251;p10"/>
+          <p:cNvPr id="238" name="Google Shape;238;p10"/>
           <p:cNvSpPr txBox="1"/>
           <p:nvPr/>
         </p:nvSpPr>
@@ -17814,7 +15749,7 @@
       </p:sp>
       <p:sp>
         <p:nvSpPr>
-          <p:cNvPr id="252" name="Google Shape;252;p10"/>
+          <p:cNvPr id="239" name="Google Shape;239;p10"/>
           <p:cNvSpPr txBox="1"/>
           <p:nvPr/>
         </p:nvSpPr>
@@ -17895,6 +15830,871 @@
               <a:ea typeface="JetBrains Mono"/>
               <a:cs typeface="JetBrains Mono"/>
               <a:sym typeface="JetBrains Mono"/>
+            </a:endParaRPr>
+          </a:p>
+        </p:txBody>
+      </p:sp>
+      <p:sp>
+        <p:nvSpPr>
+          <p:cNvPr id="240" name="Google Shape;240;p10"/>
+          <p:cNvSpPr txBox="1"/>
+          <p:nvPr/>
+        </p:nvSpPr>
+        <p:spPr>
+          <a:xfrm>
+            <a:off x="609600" y="1244002"/>
+            <a:ext cx="9771300" cy="4990200"/>
+          </a:xfrm>
+          <a:prstGeom prst="rect">
+            <a:avLst/>
+          </a:prstGeom>
+          <a:noFill/>
+          <a:ln>
+            <a:noFill/>
+          </a:ln>
+        </p:spPr>
+        <p:txBody>
+          <a:bodyPr anchorCtr="0" anchor="t" bIns="91425" lIns="91425" spcFirstLastPara="1" rIns="91425" wrap="square" tIns="91425">
+            <a:spAutoFit/>
+          </a:bodyPr>
+          <a:lstStyle/>
+          <a:p>
+            <a:pPr indent="0" lvl="0" marL="0" rtl="0" algn="l">
+              <a:lnSpc>
+                <a:spcPct val="115000"/>
+              </a:lnSpc>
+              <a:spcBef>
+                <a:spcPts val="1200"/>
+              </a:spcBef>
+              <a:spcAft>
+                <a:spcPts val="0"/>
+              </a:spcAft>
+              <a:buNone/>
+            </a:pPr>
+            <a:r>
+              <a:rPr b="1" lang="en-US" sz="1300">
+                <a:solidFill>
+                  <a:srgbClr val="781F18"/>
+                </a:solidFill>
+              </a:rPr>
+              <a:t>MODEL &amp; TRAINING DATA</a:t>
+            </a:r>
+            <a:endParaRPr b="1" sz="1300">
+              <a:solidFill>
+                <a:srgbClr val="781F18"/>
+              </a:solidFill>
+            </a:endParaRPr>
+          </a:p>
+          <a:p>
+            <a:pPr indent="-311150" lvl="0" marL="457200" rtl="0" algn="l">
+              <a:lnSpc>
+                <a:spcPct val="115000"/>
+              </a:lnSpc>
+              <a:spcBef>
+                <a:spcPts val="1200"/>
+              </a:spcBef>
+              <a:spcAft>
+                <a:spcPts val="0"/>
+              </a:spcAft>
+              <a:buClr>
+                <a:schemeClr val="dk1"/>
+              </a:buClr>
+              <a:buSzPts val="1300"/>
+              <a:buChar char="●"/>
+            </a:pPr>
+            <a:r>
+              <a:rPr b="1" lang="en-US" sz="1300">
+                <a:solidFill>
+                  <a:schemeClr val="dk1"/>
+                </a:solidFill>
+              </a:rPr>
+              <a:t>Model:</a:t>
+            </a:r>
+            <a:r>
+              <a:rPr lang="en-US" sz="1300">
+                <a:solidFill>
+                  <a:schemeClr val="dk1"/>
+                </a:solidFill>
+                <a:uFill>
+                  <a:noFill/>
+                </a:uFill>
+                <a:hlinkClick r:id="rId3">
+                  <a:extLst>
+                    <a:ext uri="{A12FA001-AC4F-418D-AE19-62706E023703}">
+                      <ahyp:hlinkClr val="tx"/>
+                    </a:ext>
+                  </a:extLst>
+                </a:hlinkClick>
+              </a:rPr>
+              <a:t> </a:t>
+            </a:r>
+            <a:r>
+              <a:rPr lang="en-US" sz="1300" u="sng">
+                <a:solidFill>
+                  <a:schemeClr val="hlink"/>
+                </a:solidFill>
+                <a:hlinkClick r:id="rId4"/>
+              </a:rPr>
+              <a:t>Paper</a:t>
+            </a:r>
+            <a:r>
+              <a:rPr lang="en-US" sz="1300">
+                <a:solidFill>
+                  <a:schemeClr val="dk1"/>
+                </a:solidFill>
+              </a:rPr>
+              <a:t> ·</a:t>
+            </a:r>
+            <a:r>
+              <a:rPr lang="en-US" sz="1300">
+                <a:solidFill>
+                  <a:schemeClr val="dk1"/>
+                </a:solidFill>
+                <a:uFill>
+                  <a:noFill/>
+                </a:uFill>
+                <a:hlinkClick r:id="rId5">
+                  <a:extLst>
+                    <a:ext uri="{A12FA001-AC4F-418D-AE19-62706E023703}">
+                      <ahyp:hlinkClr val="tx"/>
+                    </a:ext>
+                  </a:extLst>
+                </a:hlinkClick>
+              </a:rPr>
+              <a:t> </a:t>
+            </a:r>
+            <a:r>
+              <a:rPr lang="en-US" sz="1300" u="sng">
+                <a:solidFill>
+                  <a:schemeClr val="hlink"/>
+                </a:solidFill>
+                <a:hlinkClick r:id="rId6"/>
+              </a:rPr>
+              <a:t>Official code</a:t>
+            </a:r>
+            <a:r>
+              <a:rPr lang="en-US" sz="1300">
+                <a:solidFill>
+                  <a:schemeClr val="dk1"/>
+                </a:solidFill>
+              </a:rPr>
+              <a:t> ·</a:t>
+            </a:r>
+            <a:r>
+              <a:rPr lang="en-US" sz="1300" u="sng">
+                <a:solidFill>
+                  <a:schemeClr val="hlink"/>
+                </a:solidFill>
+                <a:hlinkClick r:id="rId7"/>
+              </a:rPr>
+              <a:t>models</a:t>
+            </a:r>
+            <a:endParaRPr sz="1300" u="sng">
+              <a:solidFill>
+                <a:schemeClr val="hlink"/>
+              </a:solidFill>
+            </a:endParaRPr>
+          </a:p>
+          <a:p>
+            <a:pPr indent="-311150" lvl="0" marL="457200" rtl="0" algn="l">
+              <a:lnSpc>
+                <a:spcPct val="115000"/>
+              </a:lnSpc>
+              <a:spcBef>
+                <a:spcPts val="0"/>
+              </a:spcBef>
+              <a:spcAft>
+                <a:spcPts val="0"/>
+              </a:spcAft>
+              <a:buClr>
+                <a:schemeClr val="dk1"/>
+              </a:buClr>
+              <a:buSzPts val="1300"/>
+              <a:buChar char="●"/>
+            </a:pPr>
+            <a:r>
+              <a:rPr b="1" lang="en-US" sz="1300">
+                <a:solidFill>
+                  <a:schemeClr val="dk1"/>
+                </a:solidFill>
+              </a:rPr>
+              <a:t>Training sources:</a:t>
+            </a:r>
+            <a:r>
+              <a:rPr lang="en-US" sz="1300">
+                <a:solidFill>
+                  <a:schemeClr val="dk1"/>
+                </a:solidFill>
+                <a:uFill>
+                  <a:noFill/>
+                </a:uFill>
+                <a:hlinkClick r:id="rId8">
+                  <a:extLst>
+                    <a:ext uri="{A12FA001-AC4F-418D-AE19-62706E023703}">
+                      <ahyp:hlinkClr val="tx"/>
+                    </a:ext>
+                  </a:extLst>
+                </a:hlinkClick>
+              </a:rPr>
+              <a:t> </a:t>
+            </a:r>
+            <a:r>
+              <a:rPr lang="en-US" sz="1300" u="sng">
+                <a:solidFill>
+                  <a:schemeClr val="hlink"/>
+                </a:solidFill>
+                <a:hlinkClick r:id="rId9"/>
+              </a:rPr>
+              <a:t>Open Images</a:t>
+            </a:r>
+            <a:r>
+              <a:rPr lang="en-US" sz="1300">
+                <a:solidFill>
+                  <a:schemeClr val="dk1"/>
+                </a:solidFill>
+              </a:rPr>
+              <a:t>,</a:t>
+            </a:r>
+            <a:r>
+              <a:rPr lang="en-US" sz="1300">
+                <a:solidFill>
+                  <a:schemeClr val="dk1"/>
+                </a:solidFill>
+                <a:uFill>
+                  <a:noFill/>
+                </a:uFill>
+                <a:hlinkClick r:id="rId10">
+                  <a:extLst>
+                    <a:ext uri="{A12FA001-AC4F-418D-AE19-62706E023703}">
+                      <ahyp:hlinkClr val="tx"/>
+                    </a:ext>
+                  </a:extLst>
+                </a:hlinkClick>
+              </a:rPr>
+              <a:t> </a:t>
+            </a:r>
+            <a:r>
+              <a:rPr lang="en-US" sz="1300" u="sng">
+                <a:solidFill>
+                  <a:schemeClr val="hlink"/>
+                </a:solidFill>
+                <a:hlinkClick r:id="rId11"/>
+              </a:rPr>
+              <a:t>SAM-1B</a:t>
+            </a:r>
+            <a:r>
+              <a:rPr lang="en-US" sz="1300">
+                <a:solidFill>
+                  <a:schemeClr val="dk1"/>
+                </a:solidFill>
+              </a:rPr>
+              <a:t>,</a:t>
+            </a:r>
+            <a:r>
+              <a:rPr lang="en-US" sz="1300">
+                <a:solidFill>
+                  <a:schemeClr val="dk1"/>
+                </a:solidFill>
+                <a:uFill>
+                  <a:noFill/>
+                </a:uFill>
+                <a:hlinkClick r:id="rId12">
+                  <a:extLst>
+                    <a:ext uri="{A12FA001-AC4F-418D-AE19-62706E023703}">
+                      <ahyp:hlinkClr val="tx"/>
+                    </a:ext>
+                  </a:extLst>
+                </a:hlinkClick>
+              </a:rPr>
+              <a:t> </a:t>
+            </a:r>
+            <a:r>
+              <a:rPr lang="en-US" sz="1300" u="sng">
+                <a:solidFill>
+                  <a:schemeClr val="hlink"/>
+                </a:solidFill>
+                <a:hlinkClick r:id="rId13"/>
+              </a:rPr>
+              <a:t>Flickr2K</a:t>
+            </a:r>
+            <a:r>
+              <a:rPr lang="en-US" sz="1300">
+                <a:solidFill>
+                  <a:schemeClr val="dk1"/>
+                </a:solidFill>
+              </a:rPr>
+              <a:t>,</a:t>
+            </a:r>
+            <a:r>
+              <a:rPr lang="en-US" sz="1300">
+                <a:solidFill>
+                  <a:schemeClr val="dk1"/>
+                </a:solidFill>
+                <a:uFill>
+                  <a:noFill/>
+                </a:uFill>
+                <a:hlinkClick r:id="rId14">
+                  <a:extLst>
+                    <a:ext uri="{A12FA001-AC4F-418D-AE19-62706E023703}">
+                      <ahyp:hlinkClr val="tx"/>
+                    </a:ext>
+                  </a:extLst>
+                </a:hlinkClick>
+              </a:rPr>
+              <a:t> </a:t>
+            </a:r>
+            <a:r>
+              <a:rPr lang="en-US" sz="1300" u="sng">
+                <a:solidFill>
+                  <a:schemeClr val="hlink"/>
+                </a:solidFill>
+                <a:hlinkClick r:id="rId15"/>
+              </a:rPr>
+              <a:t>DIV2K</a:t>
+            </a:r>
+            <a:r>
+              <a:rPr lang="en-US" sz="1300">
+                <a:solidFill>
+                  <a:schemeClr val="dk1"/>
+                </a:solidFill>
+              </a:rPr>
+              <a:t>,</a:t>
+            </a:r>
+            <a:r>
+              <a:rPr lang="en-US" sz="1300">
+                <a:solidFill>
+                  <a:schemeClr val="dk1"/>
+                </a:solidFill>
+                <a:uFill>
+                  <a:noFill/>
+                </a:uFill>
+                <a:hlinkClick r:id="rId16">
+                  <a:extLst>
+                    <a:ext uri="{A12FA001-AC4F-418D-AE19-62706E023703}">
+                      <ahyp:hlinkClr val="tx"/>
+                    </a:ext>
+                  </a:extLst>
+                </a:hlinkClick>
+              </a:rPr>
+              <a:t> </a:t>
+            </a:r>
+            <a:r>
+              <a:rPr lang="en-US" sz="1300" u="sng">
+                <a:solidFill>
+                  <a:schemeClr val="hlink"/>
+                </a:solidFill>
+                <a:hlinkClick r:id="rId17"/>
+              </a:rPr>
+              <a:t>CLIC</a:t>
+            </a:r>
+            <a:r>
+              <a:rPr lang="en-US" sz="1300">
+                <a:solidFill>
+                  <a:schemeClr val="dk1"/>
+                </a:solidFill>
+              </a:rPr>
+              <a:t>. The released recipe uses low- and high-resolution training stages.</a:t>
+            </a:r>
+            <a:endParaRPr sz="1300">
+              <a:solidFill>
+                <a:schemeClr val="dk1"/>
+              </a:solidFill>
+            </a:endParaRPr>
+          </a:p>
+          <a:p>
+            <a:pPr indent="-311150" lvl="0" marL="457200" rtl="0" algn="l">
+              <a:lnSpc>
+                <a:spcPct val="115000"/>
+              </a:lnSpc>
+              <a:spcBef>
+                <a:spcPts val="0"/>
+              </a:spcBef>
+              <a:spcAft>
+                <a:spcPts val="0"/>
+              </a:spcAft>
+              <a:buClr>
+                <a:schemeClr val="dk1"/>
+              </a:buClr>
+              <a:buSzPts val="1300"/>
+              <a:buChar char="●"/>
+            </a:pPr>
+            <a:r>
+              <a:rPr b="1" lang="en-US" sz="1300">
+                <a:solidFill>
+                  <a:schemeClr val="dk1"/>
+                </a:solidFill>
+              </a:rPr>
+              <a:t>Evaluation:</a:t>
+            </a:r>
+            <a:r>
+              <a:rPr lang="en-US" sz="1300">
+                <a:solidFill>
+                  <a:schemeClr val="dk1"/>
+                </a:solidFill>
+                <a:uFill>
+                  <a:noFill/>
+                </a:uFill>
+                <a:hlinkClick r:id="rId18">
+                  <a:extLst>
+                    <a:ext uri="{A12FA001-AC4F-418D-AE19-62706E023703}">
+                      <ahyp:hlinkClr val="tx"/>
+                    </a:ext>
+                  </a:extLst>
+                </a:hlinkClick>
+              </a:rPr>
+              <a:t> </a:t>
+            </a:r>
+            <a:r>
+              <a:rPr lang="en-US" sz="1300" u="sng">
+                <a:solidFill>
+                  <a:schemeClr val="hlink"/>
+                </a:solidFill>
+                <a:hlinkClick r:id="rId19"/>
+              </a:rPr>
+              <a:t>CLIC Professional validation</a:t>
+            </a:r>
+            <a:r>
+              <a:rPr lang="en-US" sz="1300">
+                <a:solidFill>
+                  <a:schemeClr val="dk1"/>
+                </a:solidFill>
+              </a:rPr>
+              <a:t> — 41 images;</a:t>
+            </a:r>
+            <a:r>
+              <a:rPr lang="en-US" sz="1300">
+                <a:solidFill>
+                  <a:schemeClr val="dk1"/>
+                </a:solidFill>
+                <a:uFill>
+                  <a:noFill/>
+                </a:uFill>
+                <a:hlinkClick r:id="rId20">
+                  <a:extLst>
+                    <a:ext uri="{A12FA001-AC4F-418D-AE19-62706E023703}">
+                      <ahyp:hlinkClr val="tx"/>
+                    </a:ext>
+                  </a:extLst>
+                </a:hlinkClick>
+              </a:rPr>
+              <a:t> </a:t>
+            </a:r>
+            <a:r>
+              <a:rPr lang="en-US" sz="1300" u="sng">
+                <a:solidFill>
+                  <a:schemeClr val="hlink"/>
+                </a:solidFill>
+                <a:hlinkClick r:id="rId21"/>
+              </a:rPr>
+              <a:t>Kodak</a:t>
+            </a:r>
+            <a:r>
+              <a:rPr lang="en-US" sz="1300">
+                <a:solidFill>
+                  <a:schemeClr val="dk1"/>
+                </a:solidFill>
+              </a:rPr>
+              <a:t> — 24 images. Evaluate </a:t>
+            </a:r>
+            <a:r>
+              <a:rPr b="1" lang="en-US" sz="1300">
+                <a:solidFill>
+                  <a:schemeClr val="dk1"/>
+                </a:solidFill>
+              </a:rPr>
+              <a:t>QP 0–7</a:t>
+            </a:r>
+            <a:r>
+              <a:rPr lang="en-US" sz="1300">
+                <a:solidFill>
+                  <a:schemeClr val="dk1"/>
+                </a:solidFill>
+              </a:rPr>
+              <a:t>; CLIC is primary, Kodak is a sanity check.</a:t>
+            </a:r>
+            <a:endParaRPr sz="1300">
+              <a:solidFill>
+                <a:schemeClr val="dk1"/>
+              </a:solidFill>
+            </a:endParaRPr>
+          </a:p>
+          <a:p>
+            <a:pPr indent="0" lvl="0" marL="0" rtl="0" algn="l">
+              <a:lnSpc>
+                <a:spcPct val="115000"/>
+              </a:lnSpc>
+              <a:spcBef>
+                <a:spcPts val="1200"/>
+              </a:spcBef>
+              <a:spcAft>
+                <a:spcPts val="0"/>
+              </a:spcAft>
+              <a:buNone/>
+            </a:pPr>
+            <a:r>
+              <a:rPr b="1" lang="en-US" sz="1300">
+                <a:solidFill>
+                  <a:srgbClr val="781F18"/>
+                </a:solidFill>
+              </a:rPr>
+              <a:t>RESEARCH &amp; TOOLS</a:t>
+            </a:r>
+            <a:endParaRPr b="1" sz="1300">
+              <a:solidFill>
+                <a:srgbClr val="781F18"/>
+              </a:solidFill>
+            </a:endParaRPr>
+          </a:p>
+          <a:p>
+            <a:pPr indent="-311150" lvl="0" marL="457200" rtl="0" algn="l">
+              <a:lnSpc>
+                <a:spcPct val="115000"/>
+              </a:lnSpc>
+              <a:spcBef>
+                <a:spcPts val="1200"/>
+              </a:spcBef>
+              <a:spcAft>
+                <a:spcPts val="0"/>
+              </a:spcAft>
+              <a:buClr>
+                <a:schemeClr val="dk1"/>
+              </a:buClr>
+              <a:buSzPts val="1300"/>
+              <a:buChar char="●"/>
+            </a:pPr>
+            <a:r>
+              <a:rPr b="1" lang="en-US" sz="1300">
+                <a:solidFill>
+                  <a:schemeClr val="dk1"/>
+                </a:solidFill>
+              </a:rPr>
+              <a:t>References:</a:t>
+            </a:r>
+            <a:r>
+              <a:rPr lang="en-US" sz="1300">
+                <a:solidFill>
+                  <a:schemeClr val="dk1"/>
+                </a:solidFill>
+                <a:uFill>
+                  <a:noFill/>
+                </a:uFill>
+                <a:hlinkClick r:id="rId22">
+                  <a:extLst>
+                    <a:ext uri="{A12FA001-AC4F-418D-AE19-62706E023703}">
+                      <ahyp:hlinkClr val="tx"/>
+                    </a:ext>
+                  </a:extLst>
+                </a:hlinkClick>
+              </a:rPr>
+              <a:t> </a:t>
+            </a:r>
+            <a:r>
+              <a:rPr lang="en-US" sz="1300" u="sng">
+                <a:solidFill>
+                  <a:schemeClr val="hlink"/>
+                </a:solidFill>
+                <a:hlinkClick r:id="rId23"/>
+              </a:rPr>
+              <a:t>HAWQ-V3</a:t>
+            </a:r>
+            <a:r>
+              <a:rPr lang="en-US" sz="1300">
+                <a:solidFill>
+                  <a:schemeClr val="dk1"/>
+                </a:solidFill>
+              </a:rPr>
+              <a:t> — hardware-aware mixed precision/ILP;</a:t>
+            </a:r>
+            <a:r>
+              <a:rPr lang="en-US" sz="1300">
+                <a:solidFill>
+                  <a:schemeClr val="dk1"/>
+                </a:solidFill>
+                <a:uFill>
+                  <a:noFill/>
+                </a:uFill>
+                <a:hlinkClick r:id="rId24">
+                  <a:extLst>
+                    <a:ext uri="{A12FA001-AC4F-418D-AE19-62706E023703}">
+                      <ahyp:hlinkClr val="tx"/>
+                    </a:ext>
+                  </a:extLst>
+                </a:hlinkClick>
+              </a:rPr>
+              <a:t> </a:t>
+            </a:r>
+            <a:r>
+              <a:rPr lang="en-US" sz="1300" u="sng">
+                <a:solidFill>
+                  <a:schemeClr val="hlink"/>
+                </a:solidFill>
+                <a:hlinkClick r:id="rId25"/>
+              </a:rPr>
+              <a:t>NVIDIA Model Optimizer</a:t>
+            </a:r>
+            <a:r>
+              <a:rPr lang="en-US" sz="1300">
+                <a:solidFill>
+                  <a:schemeClr val="dk1"/>
+                </a:solidFill>
+              </a:rPr>
+              <a:t> — quantization tools;</a:t>
+            </a:r>
+            <a:r>
+              <a:rPr lang="en-US" sz="1300">
+                <a:solidFill>
+                  <a:schemeClr val="dk1"/>
+                </a:solidFill>
+                <a:uFill>
+                  <a:noFill/>
+                </a:uFill>
+                <a:hlinkClick r:id="rId26">
+                  <a:extLst>
+                    <a:ext uri="{A12FA001-AC4F-418D-AE19-62706E023703}">
+                      <ahyp:hlinkClr val="tx"/>
+                    </a:ext>
+                  </a:extLst>
+                </a:hlinkClick>
+              </a:rPr>
+              <a:t> </a:t>
+            </a:r>
+            <a:r>
+              <a:rPr lang="en-US" sz="1300" u="sng">
+                <a:solidFill>
+                  <a:schemeClr val="hlink"/>
+                </a:solidFill>
+                <a:hlinkClick r:id="rId27"/>
+              </a:rPr>
+              <a:t>PyTorch ONNX</a:t>
+            </a:r>
+            <a:r>
+              <a:rPr lang="en-US" sz="1300">
+                <a:solidFill>
+                  <a:schemeClr val="dk1"/>
+                </a:solidFill>
+              </a:rPr>
+              <a:t> — model export.</a:t>
+            </a:r>
+            <a:endParaRPr sz="1300">
+              <a:solidFill>
+                <a:schemeClr val="dk1"/>
+              </a:solidFill>
+            </a:endParaRPr>
+          </a:p>
+          <a:p>
+            <a:pPr indent="-311150" lvl="0" marL="457200" rtl="0" algn="l">
+              <a:lnSpc>
+                <a:spcPct val="115000"/>
+              </a:lnSpc>
+              <a:spcBef>
+                <a:spcPts val="0"/>
+              </a:spcBef>
+              <a:spcAft>
+                <a:spcPts val="0"/>
+              </a:spcAft>
+              <a:buClr>
+                <a:schemeClr val="dk1"/>
+              </a:buClr>
+              <a:buSzPts val="1300"/>
+              <a:buChar char="●"/>
+            </a:pPr>
+            <a:r>
+              <a:rPr b="1" lang="en-US" sz="1300">
+                <a:solidFill>
+                  <a:schemeClr val="dk1"/>
+                </a:solidFill>
+              </a:rPr>
+              <a:t>Tools:</a:t>
+            </a:r>
+            <a:r>
+              <a:rPr lang="en-US" sz="1300">
+                <a:solidFill>
+                  <a:schemeClr val="dk1"/>
+                </a:solidFill>
+              </a:rPr>
+              <a:t> Python, PyTorch, paper’s github repository, RTX 3050 Laptop GPU, nvidia CLI tools, JSON/CSV and Matplotlib.</a:t>
+            </a:r>
+            <a:endParaRPr sz="1300">
+              <a:solidFill>
+                <a:schemeClr val="dk1"/>
+              </a:solidFill>
+            </a:endParaRPr>
+          </a:p>
+          <a:p>
+            <a:pPr indent="-311150" lvl="0" marL="457200" rtl="0" algn="l">
+              <a:lnSpc>
+                <a:spcPct val="115000"/>
+              </a:lnSpc>
+              <a:spcBef>
+                <a:spcPts val="0"/>
+              </a:spcBef>
+              <a:spcAft>
+                <a:spcPts val="0"/>
+              </a:spcAft>
+              <a:buClr>
+                <a:schemeClr val="dk1"/>
+              </a:buClr>
+              <a:buSzPts val="1300"/>
+              <a:buChar char="●"/>
+            </a:pPr>
+            <a:r>
+              <a:rPr b="1" lang="en-US" sz="1300">
+                <a:solidFill>
+                  <a:schemeClr val="dk1"/>
+                </a:solidFill>
+              </a:rPr>
+              <a:t>Planned:</a:t>
+            </a:r>
+            <a:r>
+              <a:rPr lang="en-US" sz="1300">
+                <a:solidFill>
+                  <a:schemeClr val="dk1"/>
+                </a:solidFill>
+              </a:rPr>
+              <a:t> FP16/INT8 PTQ → component × QP sensitivity map → QAT if needed → custom ILP precision selection. Investigate ONNX/TensorRT feasibility for custom entropy operations.</a:t>
+            </a:r>
+            <a:endParaRPr sz="1300">
+              <a:solidFill>
+                <a:schemeClr val="dk1"/>
+              </a:solidFill>
+            </a:endParaRPr>
+          </a:p>
+          <a:p>
+            <a:pPr indent="0" lvl="0" marL="0" rtl="0" algn="l">
+              <a:lnSpc>
+                <a:spcPct val="115000"/>
+              </a:lnSpc>
+              <a:spcBef>
+                <a:spcPts val="1200"/>
+              </a:spcBef>
+              <a:spcAft>
+                <a:spcPts val="0"/>
+              </a:spcAft>
+              <a:buNone/>
+            </a:pPr>
+            <a:r>
+              <a:rPr b="1" lang="en-US" sz="1300">
+                <a:solidFill>
+                  <a:schemeClr val="dk1"/>
+                </a:solidFill>
+              </a:rPr>
+              <a:t>WORKFLOW:</a:t>
+            </a:r>
+            <a:r>
+              <a:rPr lang="en-US" sz="1300">
+                <a:solidFill>
+                  <a:schemeClr val="dk1"/>
+                </a:solidFill>
+              </a:rPr>
+              <a:t> Released checkpoint → FP32 baseline → precision sensitivity → mixed-precision optimization → deployment evaluation</a:t>
+            </a:r>
+            <a:endParaRPr sz="1300">
+              <a:solidFill>
+                <a:schemeClr val="dk1"/>
+              </a:solidFill>
+            </a:endParaRPr>
+          </a:p>
+          <a:p>
+            <a:pPr indent="0" lvl="0" marL="0" rtl="0" algn="l">
+              <a:lnSpc>
+                <a:spcPct val="115000"/>
+              </a:lnSpc>
+              <a:spcBef>
+                <a:spcPts val="1200"/>
+              </a:spcBef>
+              <a:spcAft>
+                <a:spcPts val="0"/>
+              </a:spcAft>
+              <a:buNone/>
+            </a:pPr>
+            <a:r>
+              <a:rPr b="1" lang="en-US" sz="1300">
+                <a:solidFill>
+                  <a:schemeClr val="dk1"/>
+                </a:solidFill>
+              </a:rPr>
+              <a:t>CODE:</a:t>
+            </a:r>
+            <a:r>
+              <a:rPr lang="en-US" sz="1300">
+                <a:solidFill>
+                  <a:schemeClr val="dk1"/>
+                </a:solidFill>
+              </a:rPr>
+              <a:t> my complete set-up is present on my </a:t>
+            </a:r>
+            <a:r>
+              <a:rPr lang="en-US" sz="1300" u="sng">
+                <a:solidFill>
+                  <a:schemeClr val="hlink"/>
+                </a:solidFill>
+                <a:hlinkClick r:id="rId28"/>
+              </a:rPr>
+              <a:t>github</a:t>
+            </a:r>
+            <a:r>
+              <a:rPr lang="en-US" sz="1300">
+                <a:solidFill>
+                  <a:schemeClr val="dk1"/>
+                </a:solidFill>
+              </a:rPr>
+              <a:t> (forked from their github codebase of PULSE and we use this for project)</a:t>
+            </a:r>
+            <a:endParaRPr sz="1300">
+              <a:solidFill>
+                <a:schemeClr val="dk1"/>
+              </a:solidFill>
+            </a:endParaRPr>
+          </a:p>
+          <a:p>
+            <a:pPr indent="0" lvl="0" marL="0" rtl="0" algn="l">
+              <a:lnSpc>
+                <a:spcPct val="115000"/>
+              </a:lnSpc>
+              <a:spcBef>
+                <a:spcPts val="1200"/>
+              </a:spcBef>
+              <a:spcAft>
+                <a:spcPts val="1200"/>
+              </a:spcAft>
+              <a:buNone/>
+            </a:pPr>
+            <a:r>
+              <a:rPr b="1" i="1" lang="en-US" sz="1300">
+                <a:solidFill>
+                  <a:schemeClr val="dk1"/>
+                </a:solidFill>
+              </a:rPr>
+              <a:t>NOTE:</a:t>
+            </a:r>
+            <a:r>
+              <a:rPr i="1" lang="en-US" sz="1300">
+                <a:solidFill>
+                  <a:schemeClr val="dk1"/>
+                </a:solidFill>
+              </a:rPr>
+              <a:t> </a:t>
+            </a:r>
+            <a:r>
+              <a:rPr i="1" lang="en-US" sz="1300">
+                <a:solidFill>
+                  <a:schemeClr val="dk1"/>
+                </a:solidFill>
+              </a:rPr>
+              <a:t>Energy and memory are sampled whole-run estimates. QAT, ILP and ONNX/TensorRT deployment remain planned work; HAWQ-V3 is a reference, not a claimed </a:t>
+            </a:r>
+            <a:r>
+              <a:rPr i="1" lang="en-US" sz="1300">
+                <a:solidFill>
+                  <a:schemeClr val="dk1"/>
+                </a:solidFill>
+              </a:rPr>
+              <a:t>reproduction but we refer it for an inspiration</a:t>
+            </a:r>
+            <a:endParaRPr i="1" sz="1300">
+              <a:solidFill>
+                <a:schemeClr val="dk1"/>
+              </a:solidFill>
             </a:endParaRPr>
           </a:p>
         </p:txBody>
